--- a/submission/slides.pptx
+++ b/submission/slides.pptx
@@ -5,10 +5,10 @@
     <p:sldMasterId id="2147483648" r:id="rId1"/>
   </p:sldMasterIdLst>
   <p:notesMasterIdLst>
-    <p:notesMasterId r:id="rId18"/>
+    <p:notesMasterId r:id="rId19"/>
   </p:notesMasterIdLst>
   <p:handoutMasterIdLst>
-    <p:handoutMasterId r:id="rId19"/>
+    <p:handoutMasterId r:id="rId20"/>
   </p:handoutMasterIdLst>
   <p:sldIdLst>
     <p:sldId id="274" r:id="rId2"/>
@@ -26,7 +26,8 @@
     <p:sldId id="270" r:id="rId14"/>
     <p:sldId id="275" r:id="rId15"/>
     <p:sldId id="272" r:id="rId16"/>
-    <p:sldId id="273" r:id="rId17"/>
+    <p:sldId id="276" r:id="rId17"/>
+    <p:sldId id="273" r:id="rId18"/>
   </p:sldIdLst>
   <p:sldSz cx="12192000" cy="6858000"/>
   <p:notesSz cx="6858000" cy="9144000"/>
@@ -6017,8 +6018,8 @@
         </p:nvSpPr>
         <p:spPr>
           <a:xfrm>
-            <a:off x="9313189" y="4044653"/>
-            <a:ext cx="1760092" cy="307777"/>
+            <a:off x="9313188" y="4044653"/>
+            <a:ext cx="2234377" cy="307777"/>
           </a:xfrm>
           <a:prstGeom prst="rect">
             <a:avLst/>
@@ -6041,7 +6042,7 @@
             </a:pPr>
             <a:r>
               <a:rPr lang="en-US" dirty="0"/>
-              <a:t>Implement value</a:t>
+              <a:t>Implementation value</a:t>
             </a:r>
             <a:endParaRPr dirty="0"/>
           </a:p>
@@ -7246,14 +7247,14 @@
           <p:cNvCxnSpPr>
             <a:cxnSpLocks/>
             <a:stCxn id="18" idx="2"/>
-            <a:endCxn id="25" idx="0"/>
+            <a:endCxn id="24" idx="0"/>
           </p:cNvCxnSpPr>
           <p:nvPr/>
         </p:nvCxnSpPr>
         <p:spPr>
           <a:xfrm rot="16200000" flipH="1">
-            <a:off x="3079428" y="4392790"/>
-            <a:ext cx="689925" cy="1"/>
+            <a:off x="3097111" y="4375107"/>
+            <a:ext cx="654559" cy="1"/>
           </a:xfrm>
           <a:prstGeom prst="bentConnector3">
             <a:avLst/>
@@ -13587,7 +13588,7 @@
         <p:spPr>
           <a:xfrm>
             <a:off x="566928" y="320040"/>
-            <a:ext cx="10789920" cy="548640"/>
+            <a:ext cx="8860695" cy="477054"/>
           </a:xfrm>
           <a:prstGeom prst="rect">
             <a:avLst/>
@@ -13600,7 +13601,7 @@
           </a:bodyPr>
           <a:lstStyle/>
           <a:p>
-            <a:pPr algn="l">
+            <a:pPr>
               <a:defRPr sz="2500" b="1" i="0">
                 <a:solidFill>
                   <a:srgbClr val="052646"/>
@@ -13609,8 +13610,10 @@
               </a:defRPr>
             </a:pPr>
             <a:r>
-              <a:t>Demo / Case Study: Make the Evidence Trail Visible</a:t>
-            </a:r>
+              <a:rPr lang="en-US" sz="2500" b="1" dirty="0"/>
+              <a:t>Illustrative Case Study: Making the Evidence Trail Visible</a:t>
+            </a:r>
+            <a:endParaRPr dirty="0"/>
           </a:p>
         </p:txBody>
       </p:sp>
@@ -13652,60 +13655,14 @@
       </p:sp>
       <p:sp>
         <p:nvSpPr>
-          <p:cNvPr id="10" name="Rectangle 9"/>
-          <p:cNvSpPr/>
-          <p:nvPr/>
-        </p:nvSpPr>
-        <p:spPr>
-          <a:xfrm>
-            <a:off x="685800" y="1417320"/>
-            <a:ext cx="3840480" cy="411480"/>
-          </a:xfrm>
-          <a:prstGeom prst="rect">
-            <a:avLst/>
-          </a:prstGeom>
-          <a:solidFill>
-            <a:srgbClr val="052646"/>
-          </a:solidFill>
-          <a:ln w="12700">
-            <a:solidFill>
-              <a:srgbClr val="052646"/>
-            </a:solidFill>
-          </a:ln>
-        </p:spPr>
-        <p:style>
-          <a:lnRef idx="1">
-            <a:schemeClr val="accent1"/>
-          </a:lnRef>
-          <a:fillRef idx="3">
-            <a:schemeClr val="accent1"/>
-          </a:fillRef>
-          <a:effectRef idx="2">
-            <a:schemeClr val="accent1"/>
-          </a:effectRef>
-          <a:fontRef idx="minor">
-            <a:schemeClr val="lt1"/>
-          </a:fontRef>
-        </p:style>
-        <p:txBody>
-          <a:bodyPr rtlCol="0" anchor="ctr"/>
-          <a:lstStyle/>
-          <a:p>
-            <a:pPr algn="ctr"/>
-            <a:endParaRPr/>
-          </a:p>
-        </p:txBody>
-      </p:sp>
-      <p:sp>
-        <p:nvSpPr>
-          <p:cNvPr id="11" name="TextBox 10"/>
+          <p:cNvPr id="42" name="TextBox 41"/>
           <p:cNvSpPr txBox="1"/>
           <p:nvPr/>
         </p:nvSpPr>
         <p:spPr>
           <a:xfrm>
-            <a:off x="758952" y="1554480"/>
-            <a:ext cx="3694176" cy="91440"/>
+            <a:off x="777240" y="4500152"/>
+            <a:ext cx="2011680" cy="228600"/>
           </a:xfrm>
           <a:prstGeom prst="rect">
             <a:avLst/>
@@ -13718,606 +13675,32 @@
           </a:bodyPr>
           <a:lstStyle/>
           <a:p>
-            <a:pPr algn="ctr">
-              <a:defRPr sz="850" b="1" i="0">
+            <a:pPr algn="l">
+              <a:defRPr sz="1400" b="1" i="0">
                 <a:solidFill>
-                  <a:srgbClr val="FFFFFF"/>
+                  <a:srgbClr val="052646"/>
                 </a:solidFill>
                 <a:latin typeface="Arial" panose="020B0604020202020204"/>
               </a:defRPr>
             </a:pPr>
             <a:r>
-              <a:t>Sentence unit</a:t>
-            </a:r>
-          </a:p>
-        </p:txBody>
-      </p:sp>
-      <p:sp>
-        <p:nvSpPr>
-          <p:cNvPr id="12" name="Rectangle 11"/>
+              <a:t>Main error sources</a:t>
+            </a:r>
+          </a:p>
+        </p:txBody>
+      </p:sp>
+      <p:sp>
+        <p:nvSpPr>
+          <p:cNvPr id="43" name="Rounded Rectangle 42"/>
           <p:cNvSpPr/>
           <p:nvPr/>
         </p:nvSpPr>
         <p:spPr>
           <a:xfrm>
-            <a:off x="4526280" y="1417320"/>
-            <a:ext cx="1920240" cy="411480"/>
-          </a:xfrm>
-          <a:prstGeom prst="rect">
-            <a:avLst/>
-          </a:prstGeom>
-          <a:solidFill>
-            <a:srgbClr val="052646"/>
-          </a:solidFill>
-          <a:ln w="12700">
-            <a:solidFill>
-              <a:srgbClr val="052646"/>
-            </a:solidFill>
-          </a:ln>
-        </p:spPr>
-        <p:style>
-          <a:lnRef idx="1">
-            <a:schemeClr val="accent1"/>
-          </a:lnRef>
-          <a:fillRef idx="3">
-            <a:schemeClr val="accent1"/>
-          </a:fillRef>
-          <a:effectRef idx="2">
-            <a:schemeClr val="accent1"/>
-          </a:effectRef>
-          <a:fontRef idx="minor">
-            <a:schemeClr val="lt1"/>
-          </a:fontRef>
-        </p:style>
-        <p:txBody>
-          <a:bodyPr rtlCol="0" anchor="ctr"/>
-          <a:lstStyle/>
-          <a:p>
-            <a:pPr algn="ctr"/>
-            <a:endParaRPr/>
-          </a:p>
-        </p:txBody>
-      </p:sp>
-      <p:sp>
-        <p:nvSpPr>
-          <p:cNvPr id="13" name="TextBox 12"/>
-          <p:cNvSpPr txBox="1"/>
-          <p:nvPr/>
-        </p:nvSpPr>
-        <p:spPr>
-          <a:xfrm>
-            <a:off x="4599432" y="1554480"/>
-            <a:ext cx="1773936" cy="91440"/>
-          </a:xfrm>
-          <a:prstGeom prst="rect">
-            <a:avLst/>
-          </a:prstGeom>
-          <a:noFill/>
-        </p:spPr>
-        <p:txBody>
-          <a:bodyPr wrap="none" anchor="t">
-            <a:spAutoFit/>
-          </a:bodyPr>
-          <a:lstStyle/>
-          <a:p>
-            <a:pPr algn="ctr">
-              <a:defRPr sz="850" b="1" i="0">
-                <a:solidFill>
-                  <a:srgbClr val="FFFFFF"/>
-                </a:solidFill>
-                <a:latin typeface="Arial" panose="020B0604020202020204"/>
-              </a:defRPr>
-            </a:pPr>
-            <a:r>
-              <a:t>Top evidence</a:t>
-            </a:r>
-          </a:p>
-        </p:txBody>
-      </p:sp>
-      <p:sp>
-        <p:nvSpPr>
-          <p:cNvPr id="14" name="Rectangle 13"/>
-          <p:cNvSpPr/>
-          <p:nvPr/>
-        </p:nvSpPr>
-        <p:spPr>
-          <a:xfrm>
-            <a:off x="6446520" y="1417320"/>
-            <a:ext cx="1554480" cy="411480"/>
-          </a:xfrm>
-          <a:prstGeom prst="rect">
-            <a:avLst/>
-          </a:prstGeom>
-          <a:solidFill>
-            <a:srgbClr val="052646"/>
-          </a:solidFill>
-          <a:ln w="12700">
-            <a:solidFill>
-              <a:srgbClr val="052646"/>
-            </a:solidFill>
-          </a:ln>
-        </p:spPr>
-        <p:style>
-          <a:lnRef idx="1">
-            <a:schemeClr val="accent1"/>
-          </a:lnRef>
-          <a:fillRef idx="3">
-            <a:schemeClr val="accent1"/>
-          </a:fillRef>
-          <a:effectRef idx="2">
-            <a:schemeClr val="accent1"/>
-          </a:effectRef>
-          <a:fontRef idx="minor">
-            <a:schemeClr val="lt1"/>
-          </a:fontRef>
-        </p:style>
-        <p:txBody>
-          <a:bodyPr rtlCol="0" anchor="ctr"/>
-          <a:lstStyle/>
-          <a:p>
-            <a:pPr algn="ctr"/>
-            <a:endParaRPr/>
-          </a:p>
-        </p:txBody>
-      </p:sp>
-      <p:sp>
-        <p:nvSpPr>
-          <p:cNvPr id="15" name="TextBox 14"/>
-          <p:cNvSpPr txBox="1"/>
-          <p:nvPr/>
-        </p:nvSpPr>
-        <p:spPr>
-          <a:xfrm>
-            <a:off x="6519672" y="1554480"/>
-            <a:ext cx="1408176" cy="91440"/>
-          </a:xfrm>
-          <a:prstGeom prst="rect">
-            <a:avLst/>
-          </a:prstGeom>
-          <a:noFill/>
-        </p:spPr>
-        <p:txBody>
-          <a:bodyPr wrap="none" anchor="t">
-            <a:spAutoFit/>
-          </a:bodyPr>
-          <a:lstStyle/>
-          <a:p>
-            <a:pPr algn="ctr">
-              <a:defRPr sz="850" b="1" i="0">
-                <a:solidFill>
-                  <a:srgbClr val="FFFFFF"/>
-                </a:solidFill>
-                <a:latin typeface="Arial" panose="020B0604020202020204"/>
-              </a:defRPr>
-            </a:pPr>
-            <a:r>
-              <a:t>NLI label</a:t>
-            </a:r>
-          </a:p>
-        </p:txBody>
-      </p:sp>
-      <p:sp>
-        <p:nvSpPr>
-          <p:cNvPr id="16" name="Rectangle 15"/>
-          <p:cNvSpPr/>
-          <p:nvPr/>
-        </p:nvSpPr>
-        <p:spPr>
-          <a:xfrm>
-            <a:off x="8001000" y="1417320"/>
-            <a:ext cx="3154680" cy="411480"/>
-          </a:xfrm>
-          <a:prstGeom prst="rect">
-            <a:avLst/>
-          </a:prstGeom>
-          <a:solidFill>
-            <a:srgbClr val="052646"/>
-          </a:solidFill>
-          <a:ln w="12700">
-            <a:solidFill>
-              <a:srgbClr val="052646"/>
-            </a:solidFill>
-          </a:ln>
-        </p:spPr>
-        <p:style>
-          <a:lnRef idx="1">
-            <a:schemeClr val="accent1"/>
-          </a:lnRef>
-          <a:fillRef idx="3">
-            <a:schemeClr val="accent1"/>
-          </a:fillRef>
-          <a:effectRef idx="2">
-            <a:schemeClr val="accent1"/>
-          </a:effectRef>
-          <a:fontRef idx="minor">
-            <a:schemeClr val="lt1"/>
-          </a:fontRef>
-        </p:style>
-        <p:txBody>
-          <a:bodyPr rtlCol="0" anchor="ctr"/>
-          <a:lstStyle/>
-          <a:p>
-            <a:pPr algn="ctr"/>
-            <a:endParaRPr/>
-          </a:p>
-        </p:txBody>
-      </p:sp>
-      <p:sp>
-        <p:nvSpPr>
-          <p:cNvPr id="17" name="TextBox 16"/>
-          <p:cNvSpPr txBox="1"/>
-          <p:nvPr/>
-        </p:nvSpPr>
-        <p:spPr>
-          <a:xfrm>
-            <a:off x="8074152" y="1554480"/>
-            <a:ext cx="3008376" cy="91440"/>
-          </a:xfrm>
-          <a:prstGeom prst="rect">
-            <a:avLst/>
-          </a:prstGeom>
-          <a:noFill/>
-        </p:spPr>
-        <p:txBody>
-          <a:bodyPr wrap="none" anchor="t">
-            <a:spAutoFit/>
-          </a:bodyPr>
-          <a:lstStyle/>
-          <a:p>
-            <a:pPr algn="ctr">
-              <a:defRPr sz="850" b="1" i="0">
-                <a:solidFill>
-                  <a:srgbClr val="FFFFFF"/>
-                </a:solidFill>
-                <a:latin typeface="Arial" panose="020B0604020202020204"/>
-              </a:defRPr>
-            </a:pPr>
-            <a:r>
-              <a:t>Why it matters</a:t>
-            </a:r>
-          </a:p>
-        </p:txBody>
-      </p:sp>
-      <p:sp>
-        <p:nvSpPr>
-          <p:cNvPr id="18" name="Rectangle 17"/>
-          <p:cNvSpPr/>
-          <p:nvPr/>
-        </p:nvSpPr>
-        <p:spPr>
-          <a:xfrm>
-            <a:off x="685800" y="1828800"/>
-            <a:ext cx="3840480" cy="713232"/>
-          </a:xfrm>
-          <a:prstGeom prst="rect">
-            <a:avLst/>
-          </a:prstGeom>
-          <a:solidFill>
-            <a:srgbClr val="FFFFFF"/>
-          </a:solidFill>
-          <a:ln w="12700">
-            <a:solidFill>
-              <a:srgbClr val="DCE2EB"/>
-            </a:solidFill>
-          </a:ln>
-        </p:spPr>
-        <p:style>
-          <a:lnRef idx="1">
-            <a:schemeClr val="accent1"/>
-          </a:lnRef>
-          <a:fillRef idx="3">
-            <a:schemeClr val="accent1"/>
-          </a:fillRef>
-          <a:effectRef idx="2">
-            <a:schemeClr val="accent1"/>
-          </a:effectRef>
-          <a:fontRef idx="minor">
-            <a:schemeClr val="lt1"/>
-          </a:fontRef>
-        </p:style>
-        <p:txBody>
-          <a:bodyPr rtlCol="0" anchor="ctr"/>
-          <a:lstStyle/>
-          <a:p>
-            <a:pPr algn="ctr"/>
-            <a:endParaRPr/>
-          </a:p>
-        </p:txBody>
-      </p:sp>
-      <p:sp>
-        <p:nvSpPr>
-          <p:cNvPr id="19" name="TextBox 18"/>
-          <p:cNvSpPr txBox="1"/>
-          <p:nvPr/>
-        </p:nvSpPr>
-        <p:spPr>
-          <a:xfrm>
-            <a:off x="777240" y="1993392"/>
-            <a:ext cx="3657600" cy="320040"/>
-          </a:xfrm>
-          <a:prstGeom prst="rect">
-            <a:avLst/>
-          </a:prstGeom>
-          <a:noFill/>
-        </p:spPr>
-        <p:txBody>
-          <a:bodyPr wrap="none" anchor="t">
-            <a:spAutoFit/>
-          </a:bodyPr>
-          <a:lstStyle/>
-          <a:p>
-            <a:pPr algn="ctr">
-              <a:defRPr sz="860" b="0" i="0">
-                <a:solidFill>
-                  <a:srgbClr val="5B6979"/>
-                </a:solidFill>
-                <a:latin typeface="Arial" panose="020B0604020202020204"/>
-              </a:defRPr>
-            </a:pPr>
-            <a:r>
-              <a:t>Brockman disclosed financial ties and a nearly $30B stake.</a:t>
-            </a:r>
-          </a:p>
-        </p:txBody>
-      </p:sp>
-      <p:sp>
-        <p:nvSpPr>
-          <p:cNvPr id="20" name="Rectangle 19"/>
-          <p:cNvSpPr/>
-          <p:nvPr/>
-        </p:nvSpPr>
-        <p:spPr>
-          <a:xfrm>
-            <a:off x="4526280" y="1828800"/>
-            <a:ext cx="1920240" cy="713232"/>
-          </a:xfrm>
-          <a:prstGeom prst="rect">
-            <a:avLst/>
-          </a:prstGeom>
-          <a:solidFill>
-            <a:srgbClr val="FFFFFF"/>
-          </a:solidFill>
-          <a:ln w="12700">
-            <a:solidFill>
-              <a:srgbClr val="DCE2EB"/>
-            </a:solidFill>
-          </a:ln>
-        </p:spPr>
-        <p:style>
-          <a:lnRef idx="1">
-            <a:schemeClr val="accent1"/>
-          </a:lnRef>
-          <a:fillRef idx="3">
-            <a:schemeClr val="accent1"/>
-          </a:fillRef>
-          <a:effectRef idx="2">
-            <a:schemeClr val="accent1"/>
-          </a:effectRef>
-          <a:fontRef idx="minor">
-            <a:schemeClr val="lt1"/>
-          </a:fontRef>
-        </p:style>
-        <p:txBody>
-          <a:bodyPr rtlCol="0" anchor="ctr"/>
-          <a:lstStyle/>
-          <a:p>
-            <a:pPr algn="ctr"/>
-            <a:endParaRPr/>
-          </a:p>
-        </p:txBody>
-      </p:sp>
-      <p:sp>
-        <p:nvSpPr>
-          <p:cNvPr id="21" name="TextBox 20"/>
-          <p:cNvSpPr txBox="1"/>
-          <p:nvPr/>
-        </p:nvSpPr>
-        <p:spPr>
-          <a:xfrm>
-            <a:off x="4617720" y="1993392"/>
-            <a:ext cx="1737360" cy="320040"/>
-          </a:xfrm>
-          <a:prstGeom prst="rect">
-            <a:avLst/>
-          </a:prstGeom>
-          <a:noFill/>
-        </p:spPr>
-        <p:txBody>
-          <a:bodyPr wrap="none" anchor="t">
-            <a:spAutoFit/>
-          </a:bodyPr>
-          <a:lstStyle/>
-          <a:p>
-            <a:pPr algn="ctr">
-              <a:defRPr sz="860" b="0" i="0">
-                <a:solidFill>
-                  <a:srgbClr val="5B6979"/>
-                </a:solidFill>
-                <a:latin typeface="Arial" panose="020B0604020202020204"/>
-              </a:defRPr>
-            </a:pPr>
-            <a:r>
-              <a:t>Reuters</a:t>
-            </a:r>
-          </a:p>
-        </p:txBody>
-      </p:sp>
-      <p:sp>
-        <p:nvSpPr>
-          <p:cNvPr id="22" name="Rectangle 21"/>
-          <p:cNvSpPr/>
-          <p:nvPr/>
-        </p:nvSpPr>
-        <p:spPr>
-          <a:xfrm>
-            <a:off x="6446520" y="1828800"/>
-            <a:ext cx="1554480" cy="713232"/>
-          </a:xfrm>
-          <a:prstGeom prst="rect">
-            <a:avLst/>
-          </a:prstGeom>
-          <a:solidFill>
-            <a:srgbClr val="FFFFFF"/>
-          </a:solidFill>
-          <a:ln w="12700">
-            <a:solidFill>
-              <a:srgbClr val="DCE2EB"/>
-            </a:solidFill>
-          </a:ln>
-        </p:spPr>
-        <p:style>
-          <a:lnRef idx="1">
-            <a:schemeClr val="accent1"/>
-          </a:lnRef>
-          <a:fillRef idx="3">
-            <a:schemeClr val="accent1"/>
-          </a:fillRef>
-          <a:effectRef idx="2">
-            <a:schemeClr val="accent1"/>
-          </a:effectRef>
-          <a:fontRef idx="minor">
-            <a:schemeClr val="lt1"/>
-          </a:fontRef>
-        </p:style>
-        <p:txBody>
-          <a:bodyPr rtlCol="0" anchor="ctr"/>
-          <a:lstStyle/>
-          <a:p>
-            <a:pPr algn="ctr"/>
-            <a:endParaRPr/>
-          </a:p>
-        </p:txBody>
-      </p:sp>
-      <p:sp>
-        <p:nvSpPr>
-          <p:cNvPr id="23" name="TextBox 22"/>
-          <p:cNvSpPr txBox="1"/>
-          <p:nvPr/>
-        </p:nvSpPr>
-        <p:spPr>
-          <a:xfrm>
-            <a:off x="6537960" y="1993392"/>
-            <a:ext cx="1371600" cy="320040"/>
-          </a:xfrm>
-          <a:prstGeom prst="rect">
-            <a:avLst/>
-          </a:prstGeom>
-          <a:noFill/>
-        </p:spPr>
-        <p:txBody>
-          <a:bodyPr wrap="none" anchor="t">
-            <a:spAutoFit/>
-          </a:bodyPr>
-          <a:lstStyle/>
-          <a:p>
-            <a:pPr algn="ctr">
-              <a:defRPr sz="860" b="1" i="0">
-                <a:solidFill>
-                  <a:srgbClr val="279F60"/>
-                </a:solidFill>
-                <a:latin typeface="Arial" panose="020B0604020202020204"/>
-              </a:defRPr>
-            </a:pPr>
-            <a:r>
-              <a:t>Supported</a:t>
-            </a:r>
-          </a:p>
-        </p:txBody>
-      </p:sp>
-      <p:sp>
-        <p:nvSpPr>
-          <p:cNvPr id="24" name="Rectangle 23"/>
-          <p:cNvSpPr/>
-          <p:nvPr/>
-        </p:nvSpPr>
-        <p:spPr>
-          <a:xfrm>
-            <a:off x="8001000" y="1828800"/>
-            <a:ext cx="3154680" cy="713232"/>
-          </a:xfrm>
-          <a:prstGeom prst="rect">
-            <a:avLst/>
-          </a:prstGeom>
-          <a:solidFill>
-            <a:srgbClr val="FFFFFF"/>
-          </a:solidFill>
-          <a:ln w="12700">
-            <a:solidFill>
-              <a:srgbClr val="DCE2EB"/>
-            </a:solidFill>
-          </a:ln>
-        </p:spPr>
-        <p:style>
-          <a:lnRef idx="1">
-            <a:schemeClr val="accent1"/>
-          </a:lnRef>
-          <a:fillRef idx="3">
-            <a:schemeClr val="accent1"/>
-          </a:fillRef>
-          <a:effectRef idx="2">
-            <a:schemeClr val="accent1"/>
-          </a:effectRef>
-          <a:fontRef idx="minor">
-            <a:schemeClr val="lt1"/>
-          </a:fontRef>
-        </p:style>
-        <p:txBody>
-          <a:bodyPr rtlCol="0" anchor="ctr"/>
-          <a:lstStyle/>
-          <a:p>
-            <a:pPr algn="ctr"/>
-            <a:endParaRPr/>
-          </a:p>
-        </p:txBody>
-      </p:sp>
-      <p:sp>
-        <p:nvSpPr>
-          <p:cNvPr id="25" name="TextBox 24"/>
-          <p:cNvSpPr txBox="1"/>
-          <p:nvPr/>
-        </p:nvSpPr>
-        <p:spPr>
-          <a:xfrm>
-            <a:off x="8092440" y="1993392"/>
-            <a:ext cx="2971800" cy="320040"/>
-          </a:xfrm>
-          <a:prstGeom prst="rect">
-            <a:avLst/>
-          </a:prstGeom>
-          <a:noFill/>
-        </p:spPr>
-        <p:txBody>
-          <a:bodyPr wrap="none" anchor="t">
-            <a:spAutoFit/>
-          </a:bodyPr>
-          <a:lstStyle/>
-          <a:p>
-            <a:pPr algn="ctr">
-              <a:defRPr sz="860" b="0" i="0">
-                <a:solidFill>
-                  <a:srgbClr val="5B6979"/>
-                </a:solidFill>
-                <a:latin typeface="Arial" panose="020B0604020202020204"/>
-              </a:defRPr>
-            </a:pPr>
-            <a:r>
-              <a:t>Strong evidence match for financial-interest statement.</a:t>
-            </a:r>
-          </a:p>
-        </p:txBody>
-      </p:sp>
-      <p:sp>
-        <p:nvSpPr>
-          <p:cNvPr id="26" name="Rectangle 25"/>
-          <p:cNvSpPr/>
-          <p:nvPr/>
-        </p:nvSpPr>
-        <p:spPr>
-          <a:xfrm>
-            <a:off x="685800" y="2542032"/>
-            <a:ext cx="3840480" cy="713232"/>
-          </a:xfrm>
-          <a:prstGeom prst="rect">
+            <a:off x="777240" y="4865912"/>
+            <a:ext cx="2331720" cy="914400"/>
+          </a:xfrm>
+          <a:prstGeom prst="roundRect">
             <a:avLst/>
           </a:prstGeom>
           <a:solidFill>
@@ -14354,14 +13737,60 @@
       </p:sp>
       <p:sp>
         <p:nvSpPr>
-          <p:cNvPr id="27" name="TextBox 26"/>
+          <p:cNvPr id="44" name="Rectangle 43"/>
+          <p:cNvSpPr/>
+          <p:nvPr/>
+        </p:nvSpPr>
+        <p:spPr>
+          <a:xfrm>
+            <a:off x="777240" y="5388425"/>
+            <a:ext cx="2331720" cy="54864"/>
+          </a:xfrm>
+          <a:prstGeom prst="rect">
+            <a:avLst/>
+          </a:prstGeom>
+          <a:solidFill>
+            <a:srgbClr val="D23741"/>
+          </a:solidFill>
+          <a:ln>
+            <a:solidFill>
+              <a:srgbClr val="D23741"/>
+            </a:solidFill>
+          </a:ln>
+        </p:spPr>
+        <p:style>
+          <a:lnRef idx="1">
+            <a:schemeClr val="accent1"/>
+          </a:lnRef>
+          <a:fillRef idx="3">
+            <a:schemeClr val="accent1"/>
+          </a:fillRef>
+          <a:effectRef idx="2">
+            <a:schemeClr val="accent1"/>
+          </a:effectRef>
+          <a:fontRef idx="minor">
+            <a:schemeClr val="lt1"/>
+          </a:fontRef>
+        </p:style>
+        <p:txBody>
+          <a:bodyPr rtlCol="0" anchor="ctr"/>
+          <a:lstStyle/>
+          <a:p>
+            <a:pPr algn="ctr"/>
+            <a:endParaRPr/>
+          </a:p>
+        </p:txBody>
+      </p:sp>
+      <p:sp>
+        <p:nvSpPr>
+          <p:cNvPr id="45" name="TextBox 44"/>
           <p:cNvSpPr txBox="1"/>
           <p:nvPr/>
         </p:nvSpPr>
         <p:spPr>
           <a:xfrm>
-            <a:off x="777240" y="2706624"/>
-            <a:ext cx="3657600" cy="320040"/>
+            <a:off x="978408" y="5067080"/>
+            <a:ext cx="1929384" cy="320040"/>
           </a:xfrm>
           <a:prstGeom prst="rect">
             <a:avLst/>
@@ -14374,8 +13803,44 @@
           </a:bodyPr>
           <a:lstStyle/>
           <a:p>
-            <a:pPr algn="ctr">
-              <a:defRPr sz="860" b="0" i="0">
+            <a:pPr algn="l">
+              <a:defRPr sz="1000" b="1" i="0">
+                <a:solidFill>
+                  <a:srgbClr val="052646"/>
+                </a:solidFill>
+                <a:latin typeface="Arial" panose="020B0604020202020204"/>
+              </a:defRPr>
+            </a:pPr>
+            <a:r>
+              <a:t>Retrieval errors</a:t>
+            </a:r>
+          </a:p>
+        </p:txBody>
+      </p:sp>
+      <p:sp>
+        <p:nvSpPr>
+          <p:cNvPr id="46" name="TextBox 45"/>
+          <p:cNvSpPr txBox="1"/>
+          <p:nvPr/>
+        </p:nvSpPr>
+        <p:spPr>
+          <a:xfrm>
+            <a:off x="978408" y="5505992"/>
+            <a:ext cx="1929384" cy="137160"/>
+          </a:xfrm>
+          <a:prstGeom prst="rect">
+            <a:avLst/>
+          </a:prstGeom>
+          <a:noFill/>
+        </p:spPr>
+        <p:txBody>
+          <a:bodyPr wrap="square">
+            <a:spAutoFit/>
+          </a:bodyPr>
+          <a:lstStyle/>
+          <a:p>
+            <a:pPr>
+              <a:defRPr sz="800" b="0">
                 <a:solidFill>
                   <a:srgbClr val="5B6979"/>
                 </a:solidFill>
@@ -14383,23 +13848,23 @@
               </a:defRPr>
             </a:pPr>
             <a:r>
-              <a:t>Musk filed a lawsuit over the for-profit versus nonprofit issue.</a:t>
-            </a:r>
-          </a:p>
-        </p:txBody>
-      </p:sp>
-      <p:sp>
-        <p:nvSpPr>
-          <p:cNvPr id="28" name="Rectangle 27"/>
+              <a:t>related but insufficient evidence</a:t>
+            </a:r>
+          </a:p>
+        </p:txBody>
+      </p:sp>
+      <p:sp>
+        <p:nvSpPr>
+          <p:cNvPr id="47" name="Rounded Rectangle 46"/>
           <p:cNvSpPr/>
           <p:nvPr/>
         </p:nvSpPr>
         <p:spPr>
           <a:xfrm>
-            <a:off x="4526280" y="2542032"/>
-            <a:ext cx="1920240" cy="713232"/>
-          </a:xfrm>
-          <a:prstGeom prst="rect">
+            <a:off x="3566160" y="4865912"/>
+            <a:ext cx="2331720" cy="914400"/>
+          </a:xfrm>
+          <a:prstGeom prst="roundRect">
             <a:avLst/>
           </a:prstGeom>
           <a:solidFill>
@@ -14436,14 +13901,60 @@
       </p:sp>
       <p:sp>
         <p:nvSpPr>
-          <p:cNvPr id="29" name="TextBox 28"/>
+          <p:cNvPr id="48" name="Rectangle 47"/>
+          <p:cNvSpPr/>
+          <p:nvPr/>
+        </p:nvSpPr>
+        <p:spPr>
+          <a:xfrm>
+            <a:off x="3566160" y="5388425"/>
+            <a:ext cx="2331720" cy="54864"/>
+          </a:xfrm>
+          <a:prstGeom prst="rect">
+            <a:avLst/>
+          </a:prstGeom>
+          <a:solidFill>
+            <a:srgbClr val="D23741"/>
+          </a:solidFill>
+          <a:ln>
+            <a:solidFill>
+              <a:srgbClr val="D23741"/>
+            </a:solidFill>
+          </a:ln>
+        </p:spPr>
+        <p:style>
+          <a:lnRef idx="1">
+            <a:schemeClr val="accent1"/>
+          </a:lnRef>
+          <a:fillRef idx="3">
+            <a:schemeClr val="accent1"/>
+          </a:fillRef>
+          <a:effectRef idx="2">
+            <a:schemeClr val="accent1"/>
+          </a:effectRef>
+          <a:fontRef idx="minor">
+            <a:schemeClr val="lt1"/>
+          </a:fontRef>
+        </p:style>
+        <p:txBody>
+          <a:bodyPr rtlCol="0" anchor="ctr"/>
+          <a:lstStyle/>
+          <a:p>
+            <a:pPr algn="ctr"/>
+            <a:endParaRPr/>
+          </a:p>
+        </p:txBody>
+      </p:sp>
+      <p:sp>
+        <p:nvSpPr>
+          <p:cNvPr id="49" name="TextBox 48"/>
           <p:cNvSpPr txBox="1"/>
           <p:nvPr/>
         </p:nvSpPr>
         <p:spPr>
           <a:xfrm>
-            <a:off x="4617720" y="2706624"/>
-            <a:ext cx="1737360" cy="320040"/>
+            <a:off x="3767328" y="5067080"/>
+            <a:ext cx="1929384" cy="320040"/>
           </a:xfrm>
           <a:prstGeom prst="rect">
             <a:avLst/>
@@ -14456,8 +13967,44 @@
           </a:bodyPr>
           <a:lstStyle/>
           <a:p>
-            <a:pPr algn="ctr">
-              <a:defRPr sz="860" b="0" i="0">
+            <a:pPr algn="l">
+              <a:defRPr sz="1000" b="1" i="0">
+                <a:solidFill>
+                  <a:srgbClr val="052646"/>
+                </a:solidFill>
+                <a:latin typeface="Arial" panose="020B0604020202020204"/>
+              </a:defRPr>
+            </a:pPr>
+            <a:r>
+              <a:t>Snippet truncation</a:t>
+            </a:r>
+          </a:p>
+        </p:txBody>
+      </p:sp>
+      <p:sp>
+        <p:nvSpPr>
+          <p:cNvPr id="50" name="TextBox 49"/>
+          <p:cNvSpPr txBox="1"/>
+          <p:nvPr/>
+        </p:nvSpPr>
+        <p:spPr>
+          <a:xfrm>
+            <a:off x="3767328" y="5505992"/>
+            <a:ext cx="1929384" cy="137160"/>
+          </a:xfrm>
+          <a:prstGeom prst="rect">
+            <a:avLst/>
+          </a:prstGeom>
+          <a:noFill/>
+        </p:spPr>
+        <p:txBody>
+          <a:bodyPr wrap="square">
+            <a:spAutoFit/>
+          </a:bodyPr>
+          <a:lstStyle/>
+          <a:p>
+            <a:pPr>
+              <a:defRPr sz="800" b="0">
                 <a:solidFill>
                   <a:srgbClr val="5B6979"/>
                 </a:solidFill>
@@ -14465,23 +14012,23 @@
               </a:defRPr>
             </a:pPr>
             <a:r>
-              <a:t>Economic Times</a:t>
-            </a:r>
-          </a:p>
-        </p:txBody>
-      </p:sp>
-      <p:sp>
-        <p:nvSpPr>
-          <p:cNvPr id="30" name="Rectangle 29"/>
+              <a:t>weak premise quality</a:t>
+            </a:r>
+          </a:p>
+        </p:txBody>
+      </p:sp>
+      <p:sp>
+        <p:nvSpPr>
+          <p:cNvPr id="51" name="Rounded Rectangle 50"/>
           <p:cNvSpPr/>
           <p:nvPr/>
         </p:nvSpPr>
         <p:spPr>
           <a:xfrm>
-            <a:off x="6446520" y="2542032"/>
-            <a:ext cx="1554480" cy="713232"/>
-          </a:xfrm>
-          <a:prstGeom prst="rect">
+            <a:off x="6355079" y="4865912"/>
+            <a:ext cx="2331720" cy="914400"/>
+          </a:xfrm>
+          <a:prstGeom prst="roundRect">
             <a:avLst/>
           </a:prstGeom>
           <a:solidFill>
@@ -14518,14 +14065,60 @@
       </p:sp>
       <p:sp>
         <p:nvSpPr>
-          <p:cNvPr id="31" name="TextBox 30"/>
+          <p:cNvPr id="52" name="Rectangle 51"/>
+          <p:cNvSpPr/>
+          <p:nvPr/>
+        </p:nvSpPr>
+        <p:spPr>
+          <a:xfrm>
+            <a:off x="6355079" y="5388425"/>
+            <a:ext cx="2331720" cy="54864"/>
+          </a:xfrm>
+          <a:prstGeom prst="rect">
+            <a:avLst/>
+          </a:prstGeom>
+          <a:solidFill>
+            <a:srgbClr val="FF8F00"/>
+          </a:solidFill>
+          <a:ln>
+            <a:solidFill>
+              <a:srgbClr val="FF8F00"/>
+            </a:solidFill>
+          </a:ln>
+        </p:spPr>
+        <p:style>
+          <a:lnRef idx="1">
+            <a:schemeClr val="accent1"/>
+          </a:lnRef>
+          <a:fillRef idx="3">
+            <a:schemeClr val="accent1"/>
+          </a:fillRef>
+          <a:effectRef idx="2">
+            <a:schemeClr val="accent1"/>
+          </a:effectRef>
+          <a:fontRef idx="minor">
+            <a:schemeClr val="lt1"/>
+          </a:fontRef>
+        </p:style>
+        <p:txBody>
+          <a:bodyPr rtlCol="0" anchor="ctr"/>
+          <a:lstStyle/>
+          <a:p>
+            <a:pPr algn="ctr"/>
+            <a:endParaRPr/>
+          </a:p>
+        </p:txBody>
+      </p:sp>
+      <p:sp>
+        <p:nvSpPr>
+          <p:cNvPr id="53" name="TextBox 52"/>
           <p:cNvSpPr txBox="1"/>
           <p:nvPr/>
         </p:nvSpPr>
         <p:spPr>
           <a:xfrm>
-            <a:off x="6537960" y="2706624"/>
-            <a:ext cx="1371600" cy="320040"/>
+            <a:off x="6556247" y="5067080"/>
+            <a:ext cx="1929384" cy="320040"/>
           </a:xfrm>
           <a:prstGeom prst="rect">
             <a:avLst/>
@@ -14538,32 +14131,68 @@
           </a:bodyPr>
           <a:lstStyle/>
           <a:p>
-            <a:pPr algn="ctr">
-              <a:defRPr sz="860" b="1" i="0">
+            <a:pPr algn="l">
+              <a:defRPr sz="1000" b="1" i="0">
                 <a:solidFill>
-                  <a:srgbClr val="279F60"/>
+                  <a:srgbClr val="052646"/>
                 </a:solidFill>
                 <a:latin typeface="Arial" panose="020B0604020202020204"/>
               </a:defRPr>
             </a:pPr>
             <a:r>
-              <a:t>Supported</a:t>
-            </a:r>
-          </a:p>
-        </p:txBody>
-      </p:sp>
-      <p:sp>
-        <p:nvSpPr>
-          <p:cNvPr id="32" name="Rectangle 31"/>
+              <a:t>Multi-fact sentences</a:t>
+            </a:r>
+          </a:p>
+        </p:txBody>
+      </p:sp>
+      <p:sp>
+        <p:nvSpPr>
+          <p:cNvPr id="54" name="TextBox 53"/>
+          <p:cNvSpPr txBox="1"/>
+          <p:nvPr/>
+        </p:nvSpPr>
+        <p:spPr>
+          <a:xfrm>
+            <a:off x="6556247" y="5505992"/>
+            <a:ext cx="1929384" cy="137160"/>
+          </a:xfrm>
+          <a:prstGeom prst="rect">
+            <a:avLst/>
+          </a:prstGeom>
+          <a:noFill/>
+        </p:spPr>
+        <p:txBody>
+          <a:bodyPr wrap="square">
+            <a:spAutoFit/>
+          </a:bodyPr>
+          <a:lstStyle/>
+          <a:p>
+            <a:pPr>
+              <a:defRPr sz="800" b="0">
+                <a:solidFill>
+                  <a:srgbClr val="5B6979"/>
+                </a:solidFill>
+                <a:latin typeface="Arial" panose="020B0604020202020204"/>
+              </a:defRPr>
+            </a:pPr>
+            <a:r>
+              <a:t>one sentence contains mixed claims</a:t>
+            </a:r>
+          </a:p>
+        </p:txBody>
+      </p:sp>
+      <p:sp>
+        <p:nvSpPr>
+          <p:cNvPr id="55" name="Rounded Rectangle 54"/>
           <p:cNvSpPr/>
           <p:nvPr/>
         </p:nvSpPr>
         <p:spPr>
           <a:xfrm>
-            <a:off x="8001000" y="2542032"/>
-            <a:ext cx="3154680" cy="713232"/>
-          </a:xfrm>
-          <a:prstGeom prst="rect">
+            <a:off x="9143999" y="4865912"/>
+            <a:ext cx="2331720" cy="914400"/>
+          </a:xfrm>
+          <a:prstGeom prst="roundRect">
             <a:avLst/>
           </a:prstGeom>
           <a:solidFill>
@@ -14600,60 +14229,24 @@
       </p:sp>
       <p:sp>
         <p:nvSpPr>
-          <p:cNvPr id="33" name="TextBox 32"/>
-          <p:cNvSpPr txBox="1"/>
-          <p:nvPr/>
-        </p:nvSpPr>
-        <p:spPr>
-          <a:xfrm>
-            <a:off x="8092440" y="2706624"/>
-            <a:ext cx="2971800" cy="320040"/>
-          </a:xfrm>
-          <a:prstGeom prst="rect">
-            <a:avLst/>
-          </a:prstGeom>
-          <a:noFill/>
-        </p:spPr>
-        <p:txBody>
-          <a:bodyPr wrap="none" anchor="t">
-            <a:spAutoFit/>
-          </a:bodyPr>
-          <a:lstStyle/>
-          <a:p>
-            <a:pPr algn="ctr">
-              <a:defRPr sz="860" b="0" i="0">
-                <a:solidFill>
-                  <a:srgbClr val="5B6979"/>
-                </a:solidFill>
-                <a:latin typeface="Arial" panose="020B0604020202020204"/>
-              </a:defRPr>
-            </a:pPr>
-            <a:r>
-              <a:t>Evidence directly addresses litigation context.</a:t>
-            </a:r>
-          </a:p>
-        </p:txBody>
-      </p:sp>
-      <p:sp>
-        <p:nvSpPr>
-          <p:cNvPr id="34" name="Rectangle 33"/>
+          <p:cNvPr id="56" name="Rectangle 55"/>
           <p:cNvSpPr/>
           <p:nvPr/>
         </p:nvSpPr>
         <p:spPr>
           <a:xfrm>
-            <a:off x="685800" y="3255264"/>
-            <a:ext cx="3840480" cy="713232"/>
+            <a:off x="9143999" y="5388425"/>
+            <a:ext cx="2331720" cy="54864"/>
           </a:xfrm>
           <a:prstGeom prst="rect">
             <a:avLst/>
           </a:prstGeom>
           <a:solidFill>
-            <a:srgbClr val="FFFFFF"/>
+            <a:srgbClr val="FF8F00"/>
           </a:solidFill>
-          <a:ln w="12700">
+          <a:ln>
             <a:solidFill>
-              <a:srgbClr val="DCE2EB"/>
+              <a:srgbClr val="FF8F00"/>
             </a:solidFill>
           </a:ln>
         </p:spPr>
@@ -14682,423 +14275,13 @@
       </p:sp>
       <p:sp>
         <p:nvSpPr>
-          <p:cNvPr id="35" name="TextBox 34"/>
+          <p:cNvPr id="57" name="TextBox 56"/>
           <p:cNvSpPr txBox="1"/>
           <p:nvPr/>
         </p:nvSpPr>
         <p:spPr>
           <a:xfrm>
-            <a:off x="777240" y="3419856"/>
-            <a:ext cx="3657600" cy="320040"/>
-          </a:xfrm>
-          <a:prstGeom prst="rect">
-            <a:avLst/>
-          </a:prstGeom>
-          <a:noFill/>
-        </p:spPr>
-        <p:txBody>
-          <a:bodyPr wrap="none" anchor="t">
-            <a:spAutoFit/>
-          </a:bodyPr>
-          <a:lstStyle/>
-          <a:p>
-            <a:pPr algn="ctr">
-              <a:defRPr sz="860" b="0" i="0">
-                <a:solidFill>
-                  <a:srgbClr val="5B6979"/>
-                </a:solidFill>
-                <a:latin typeface="Arial" panose="020B0604020202020204"/>
-              </a:defRPr>
-            </a:pPr>
-            <a:r>
-              <a:t>The trial and ChatGPT launch happened in 2022.</a:t>
-            </a:r>
-          </a:p>
-        </p:txBody>
-      </p:sp>
-      <p:sp>
-        <p:nvSpPr>
-          <p:cNvPr id="36" name="Rectangle 35"/>
-          <p:cNvSpPr/>
-          <p:nvPr/>
-        </p:nvSpPr>
-        <p:spPr>
-          <a:xfrm>
-            <a:off x="4526280" y="3255264"/>
-            <a:ext cx="1920240" cy="713232"/>
-          </a:xfrm>
-          <a:prstGeom prst="rect">
-            <a:avLst/>
-          </a:prstGeom>
-          <a:solidFill>
-            <a:srgbClr val="FFFFFF"/>
-          </a:solidFill>
-          <a:ln w="12700">
-            <a:solidFill>
-              <a:srgbClr val="DCE2EB"/>
-            </a:solidFill>
-          </a:ln>
-        </p:spPr>
-        <p:style>
-          <a:lnRef idx="1">
-            <a:schemeClr val="accent1"/>
-          </a:lnRef>
-          <a:fillRef idx="3">
-            <a:schemeClr val="accent1"/>
-          </a:fillRef>
-          <a:effectRef idx="2">
-            <a:schemeClr val="accent1"/>
-          </a:effectRef>
-          <a:fontRef idx="minor">
-            <a:schemeClr val="lt1"/>
-          </a:fontRef>
-        </p:style>
-        <p:txBody>
-          <a:bodyPr rtlCol="0" anchor="ctr"/>
-          <a:lstStyle/>
-          <a:p>
-            <a:pPr algn="ctr"/>
-            <a:endParaRPr/>
-          </a:p>
-        </p:txBody>
-      </p:sp>
-      <p:sp>
-        <p:nvSpPr>
-          <p:cNvPr id="37" name="TextBox 36"/>
-          <p:cNvSpPr txBox="1"/>
-          <p:nvPr/>
-        </p:nvSpPr>
-        <p:spPr>
-          <a:xfrm>
-            <a:off x="4617720" y="3419856"/>
-            <a:ext cx="1737360" cy="320040"/>
-          </a:xfrm>
-          <a:prstGeom prst="rect">
-            <a:avLst/>
-          </a:prstGeom>
-          <a:noFill/>
-        </p:spPr>
-        <p:txBody>
-          <a:bodyPr wrap="none" anchor="t">
-            <a:spAutoFit/>
-          </a:bodyPr>
-          <a:lstStyle/>
-          <a:p>
-            <a:pPr algn="ctr">
-              <a:defRPr sz="860" b="0" i="0">
-                <a:solidFill>
-                  <a:srgbClr val="5B6979"/>
-                </a:solidFill>
-                <a:latin typeface="Arial" panose="020B0604020202020204"/>
-              </a:defRPr>
-            </a:pPr>
-            <a:r>
-              <a:t>MarketScreener</a:t>
-            </a:r>
-          </a:p>
-        </p:txBody>
-      </p:sp>
-      <p:sp>
-        <p:nvSpPr>
-          <p:cNvPr id="38" name="Rectangle 37"/>
-          <p:cNvSpPr/>
-          <p:nvPr/>
-        </p:nvSpPr>
-        <p:spPr>
-          <a:xfrm>
-            <a:off x="6446520" y="3255264"/>
-            <a:ext cx="1554480" cy="713232"/>
-          </a:xfrm>
-          <a:prstGeom prst="rect">
-            <a:avLst/>
-          </a:prstGeom>
-          <a:solidFill>
-            <a:srgbClr val="FFFFFF"/>
-          </a:solidFill>
-          <a:ln w="12700">
-            <a:solidFill>
-              <a:srgbClr val="DCE2EB"/>
-            </a:solidFill>
-          </a:ln>
-        </p:spPr>
-        <p:style>
-          <a:lnRef idx="1">
-            <a:schemeClr val="accent1"/>
-          </a:lnRef>
-          <a:fillRef idx="3">
-            <a:schemeClr val="accent1"/>
-          </a:fillRef>
-          <a:effectRef idx="2">
-            <a:schemeClr val="accent1"/>
-          </a:effectRef>
-          <a:fontRef idx="minor">
-            <a:schemeClr val="lt1"/>
-          </a:fontRef>
-        </p:style>
-        <p:txBody>
-          <a:bodyPr rtlCol="0" anchor="ctr"/>
-          <a:lstStyle/>
-          <a:p>
-            <a:pPr algn="ctr"/>
-            <a:endParaRPr/>
-          </a:p>
-        </p:txBody>
-      </p:sp>
-      <p:sp>
-        <p:nvSpPr>
-          <p:cNvPr id="39" name="TextBox 38"/>
-          <p:cNvSpPr txBox="1"/>
-          <p:nvPr/>
-        </p:nvSpPr>
-        <p:spPr>
-          <a:xfrm>
-            <a:off x="6537960" y="3419856"/>
-            <a:ext cx="1371600" cy="320040"/>
-          </a:xfrm>
-          <a:prstGeom prst="rect">
-            <a:avLst/>
-          </a:prstGeom>
-          <a:noFill/>
-        </p:spPr>
-        <p:txBody>
-          <a:bodyPr wrap="none" anchor="t">
-            <a:spAutoFit/>
-          </a:bodyPr>
-          <a:lstStyle/>
-          <a:p>
-            <a:pPr algn="ctr">
-              <a:defRPr sz="860" b="1" i="0">
-                <a:solidFill>
-                  <a:srgbClr val="279F60"/>
-                </a:solidFill>
-                <a:latin typeface="Arial" panose="020B0604020202020204"/>
-              </a:defRPr>
-            </a:pPr>
-            <a:r>
-              <a:t>NEI → Supported</a:t>
-            </a:r>
-          </a:p>
-        </p:txBody>
-      </p:sp>
-      <p:sp>
-        <p:nvSpPr>
-          <p:cNvPr id="40" name="Rectangle 39"/>
-          <p:cNvSpPr/>
-          <p:nvPr/>
-        </p:nvSpPr>
-        <p:spPr>
-          <a:xfrm>
-            <a:off x="8001000" y="3255264"/>
-            <a:ext cx="3154680" cy="713232"/>
-          </a:xfrm>
-          <a:prstGeom prst="rect">
-            <a:avLst/>
-          </a:prstGeom>
-          <a:solidFill>
-            <a:srgbClr val="FFFFFF"/>
-          </a:solidFill>
-          <a:ln w="12700">
-            <a:solidFill>
-              <a:srgbClr val="DCE2EB"/>
-            </a:solidFill>
-          </a:ln>
-        </p:spPr>
-        <p:style>
-          <a:lnRef idx="1">
-            <a:schemeClr val="accent1"/>
-          </a:lnRef>
-          <a:fillRef idx="3">
-            <a:schemeClr val="accent1"/>
-          </a:fillRef>
-          <a:effectRef idx="2">
-            <a:schemeClr val="accent1"/>
-          </a:effectRef>
-          <a:fontRef idx="minor">
-            <a:schemeClr val="lt1"/>
-          </a:fontRef>
-        </p:style>
-        <p:txBody>
-          <a:bodyPr rtlCol="0" anchor="ctr"/>
-          <a:lstStyle/>
-          <a:p>
-            <a:pPr algn="ctr"/>
-            <a:endParaRPr/>
-          </a:p>
-        </p:txBody>
-      </p:sp>
-      <p:sp>
-        <p:nvSpPr>
-          <p:cNvPr id="41" name="TextBox 40"/>
-          <p:cNvSpPr txBox="1"/>
-          <p:nvPr/>
-        </p:nvSpPr>
-        <p:spPr>
-          <a:xfrm>
-            <a:off x="8092440" y="3419856"/>
-            <a:ext cx="2971800" cy="320040"/>
-          </a:xfrm>
-          <a:prstGeom prst="rect">
-            <a:avLst/>
-          </a:prstGeom>
-          <a:noFill/>
-        </p:spPr>
-        <p:txBody>
-          <a:bodyPr wrap="none" anchor="t">
-            <a:spAutoFit/>
-          </a:bodyPr>
-          <a:lstStyle/>
-          <a:p>
-            <a:pPr algn="ctr">
-              <a:defRPr sz="860" b="0" i="0">
-                <a:solidFill>
-                  <a:srgbClr val="5B6979"/>
-                </a:solidFill>
-                <a:latin typeface="Arial" panose="020B0604020202020204"/>
-              </a:defRPr>
-            </a:pPr>
-            <a:r>
-              <a:t>NLI helps avoid overreacting to unrelated numbers.</a:t>
-            </a:r>
-          </a:p>
-        </p:txBody>
-      </p:sp>
-      <p:sp>
-        <p:nvSpPr>
-          <p:cNvPr id="42" name="TextBox 41"/>
-          <p:cNvSpPr txBox="1"/>
-          <p:nvPr/>
-        </p:nvSpPr>
-        <p:spPr>
-          <a:xfrm>
-            <a:off x="777240" y="4709160"/>
-            <a:ext cx="2011680" cy="228600"/>
-          </a:xfrm>
-          <a:prstGeom prst="rect">
-            <a:avLst/>
-          </a:prstGeom>
-          <a:noFill/>
-        </p:spPr>
-        <p:txBody>
-          <a:bodyPr wrap="none" anchor="t">
-            <a:spAutoFit/>
-          </a:bodyPr>
-          <a:lstStyle/>
-          <a:p>
-            <a:pPr algn="l">
-              <a:defRPr sz="1400" b="1" i="0">
-                <a:solidFill>
-                  <a:srgbClr val="052646"/>
-                </a:solidFill>
-                <a:latin typeface="Arial" panose="020B0604020202020204"/>
-              </a:defRPr>
-            </a:pPr>
-            <a:r>
-              <a:t>Main error sources</a:t>
-            </a:r>
-          </a:p>
-        </p:txBody>
-      </p:sp>
-      <p:sp>
-        <p:nvSpPr>
-          <p:cNvPr id="43" name="Rounded Rectangle 42"/>
-          <p:cNvSpPr/>
-          <p:nvPr/>
-        </p:nvSpPr>
-        <p:spPr>
-          <a:xfrm>
-            <a:off x="777240" y="5074920"/>
-            <a:ext cx="2331720" cy="914400"/>
-          </a:xfrm>
-          <a:prstGeom prst="roundRect">
-            <a:avLst/>
-          </a:prstGeom>
-          <a:solidFill>
-            <a:srgbClr val="F4F7FA"/>
-          </a:solidFill>
-          <a:ln w="12700">
-            <a:solidFill>
-              <a:srgbClr val="DCE2EB"/>
-            </a:solidFill>
-          </a:ln>
-        </p:spPr>
-        <p:style>
-          <a:lnRef idx="1">
-            <a:schemeClr val="accent1"/>
-          </a:lnRef>
-          <a:fillRef idx="3">
-            <a:schemeClr val="accent1"/>
-          </a:fillRef>
-          <a:effectRef idx="2">
-            <a:schemeClr val="accent1"/>
-          </a:effectRef>
-          <a:fontRef idx="minor">
-            <a:schemeClr val="lt1"/>
-          </a:fontRef>
-        </p:style>
-        <p:txBody>
-          <a:bodyPr rtlCol="0" anchor="ctr"/>
-          <a:lstStyle/>
-          <a:p>
-            <a:pPr algn="ctr"/>
-            <a:endParaRPr/>
-          </a:p>
-        </p:txBody>
-      </p:sp>
-      <p:sp>
-        <p:nvSpPr>
-          <p:cNvPr id="44" name="Rectangle 43"/>
-          <p:cNvSpPr/>
-          <p:nvPr/>
-        </p:nvSpPr>
-        <p:spPr>
-          <a:xfrm>
-            <a:off x="777240" y="5597433"/>
-            <a:ext cx="2331720" cy="54864"/>
-          </a:xfrm>
-          <a:prstGeom prst="rect">
-            <a:avLst/>
-          </a:prstGeom>
-          <a:solidFill>
-            <a:srgbClr val="D23741"/>
-          </a:solidFill>
-          <a:ln>
-            <a:solidFill>
-              <a:srgbClr val="D23741"/>
-            </a:solidFill>
-          </a:ln>
-        </p:spPr>
-        <p:style>
-          <a:lnRef idx="1">
-            <a:schemeClr val="accent1"/>
-          </a:lnRef>
-          <a:fillRef idx="3">
-            <a:schemeClr val="accent1"/>
-          </a:fillRef>
-          <a:effectRef idx="2">
-            <a:schemeClr val="accent1"/>
-          </a:effectRef>
-          <a:fontRef idx="minor">
-            <a:schemeClr val="lt1"/>
-          </a:fontRef>
-        </p:style>
-        <p:txBody>
-          <a:bodyPr rtlCol="0" anchor="ctr"/>
-          <a:lstStyle/>
-          <a:p>
-            <a:pPr algn="ctr"/>
-            <a:endParaRPr/>
-          </a:p>
-        </p:txBody>
-      </p:sp>
-      <p:sp>
-        <p:nvSpPr>
-          <p:cNvPr id="45" name="TextBox 44"/>
-          <p:cNvSpPr txBox="1"/>
-          <p:nvPr/>
-        </p:nvSpPr>
-        <p:spPr>
-          <a:xfrm>
-            <a:off x="978408" y="5276088"/>
+            <a:off x="9345167" y="5067080"/>
             <a:ext cx="1929384" cy="320040"/>
           </a:xfrm>
           <a:prstGeom prst="rect">
@@ -15121,20 +14304,20 @@
               </a:defRPr>
             </a:pPr>
             <a:r>
-              <a:t>Retrieval errors</a:t>
-            </a:r>
-          </a:p>
-        </p:txBody>
-      </p:sp>
-      <p:sp>
-        <p:nvSpPr>
-          <p:cNvPr id="46" name="TextBox 45"/>
+              <a:t>Aggregation sensitivity</a:t>
+            </a:r>
+          </a:p>
+        </p:txBody>
+      </p:sp>
+      <p:sp>
+        <p:nvSpPr>
+          <p:cNvPr id="58" name="TextBox 57"/>
           <p:cNvSpPr txBox="1"/>
           <p:nvPr/>
         </p:nvSpPr>
         <p:spPr>
           <a:xfrm>
-            <a:off x="978408" y="5715000"/>
+            <a:off x="9345167" y="5505992"/>
             <a:ext cx="1929384" cy="137160"/>
           </a:xfrm>
           <a:prstGeom prst="rect">
@@ -15157,503 +14340,323 @@
               </a:defRPr>
             </a:pPr>
             <a:r>
-              <a:t>related but insufficient evidence</a:t>
-            </a:r>
-          </a:p>
-        </p:txBody>
-      </p:sp>
-      <p:sp>
-        <p:nvSpPr>
-          <p:cNvPr id="47" name="Rounded Rectangle 46"/>
-          <p:cNvSpPr/>
-          <p:nvPr/>
-        </p:nvSpPr>
-        <p:spPr>
-          <a:xfrm>
-            <a:off x="3566160" y="5074920"/>
-            <a:ext cx="2331720" cy="914400"/>
-          </a:xfrm>
-          <a:prstGeom prst="roundRect">
-            <a:avLst/>
-          </a:prstGeom>
-          <a:solidFill>
-            <a:srgbClr val="F4F7FA"/>
-          </a:solidFill>
-          <a:ln w="12700">
-            <a:solidFill>
-              <a:srgbClr val="DCE2EB"/>
-            </a:solidFill>
-          </a:ln>
-        </p:spPr>
-        <p:style>
-          <a:lnRef idx="1">
-            <a:schemeClr val="accent1"/>
-          </a:lnRef>
-          <a:fillRef idx="3">
-            <a:schemeClr val="accent1"/>
-          </a:fillRef>
-          <a:effectRef idx="2">
-            <a:schemeClr val="accent1"/>
-          </a:effectRef>
-          <a:fontRef idx="minor">
-            <a:schemeClr val="lt1"/>
-          </a:fontRef>
-        </p:style>
-        <p:txBody>
-          <a:bodyPr rtlCol="0" anchor="ctr"/>
-          <a:lstStyle/>
-          <a:p>
-            <a:pPr algn="ctr"/>
-            <a:endParaRPr/>
-          </a:p>
-        </p:txBody>
-      </p:sp>
-      <p:sp>
-        <p:nvSpPr>
-          <p:cNvPr id="48" name="Rectangle 47"/>
-          <p:cNvSpPr/>
-          <p:nvPr/>
-        </p:nvSpPr>
-        <p:spPr>
-          <a:xfrm>
-            <a:off x="3566160" y="5597433"/>
-            <a:ext cx="2331720" cy="54864"/>
-          </a:xfrm>
-          <a:prstGeom prst="rect">
-            <a:avLst/>
-          </a:prstGeom>
-          <a:solidFill>
-            <a:srgbClr val="D23741"/>
-          </a:solidFill>
-          <a:ln>
-            <a:solidFill>
-              <a:srgbClr val="D23741"/>
-            </a:solidFill>
-          </a:ln>
-        </p:spPr>
-        <p:style>
-          <a:lnRef idx="1">
-            <a:schemeClr val="accent1"/>
-          </a:lnRef>
-          <a:fillRef idx="3">
-            <a:schemeClr val="accent1"/>
-          </a:fillRef>
-          <a:effectRef idx="2">
-            <a:schemeClr val="accent1"/>
-          </a:effectRef>
-          <a:fontRef idx="minor">
-            <a:schemeClr val="lt1"/>
-          </a:fontRef>
-        </p:style>
-        <p:txBody>
-          <a:bodyPr rtlCol="0" anchor="ctr"/>
-          <a:lstStyle/>
-          <a:p>
-            <a:pPr algn="ctr"/>
-            <a:endParaRPr/>
-          </a:p>
-        </p:txBody>
-      </p:sp>
-      <p:sp>
-        <p:nvSpPr>
-          <p:cNvPr id="49" name="TextBox 48"/>
-          <p:cNvSpPr txBox="1"/>
-          <p:nvPr/>
-        </p:nvSpPr>
-        <p:spPr>
-          <a:xfrm>
-            <a:off x="3767328" y="5276088"/>
-            <a:ext cx="1929384" cy="320040"/>
-          </a:xfrm>
-          <a:prstGeom prst="rect">
-            <a:avLst/>
-          </a:prstGeom>
-          <a:noFill/>
-        </p:spPr>
-        <p:txBody>
-          <a:bodyPr wrap="none" anchor="t">
-            <a:spAutoFit/>
-          </a:bodyPr>
-          <a:lstStyle/>
-          <a:p>
-            <a:pPr algn="l">
-              <a:defRPr sz="1000" b="1" i="0">
-                <a:solidFill>
-                  <a:srgbClr val="052646"/>
-                </a:solidFill>
-                <a:latin typeface="Arial" panose="020B0604020202020204"/>
-              </a:defRPr>
-            </a:pPr>
-            <a:r>
-              <a:t>Snippet truncation</a:t>
-            </a:r>
-          </a:p>
-        </p:txBody>
-      </p:sp>
-      <p:sp>
-        <p:nvSpPr>
-          <p:cNvPr id="50" name="TextBox 49"/>
-          <p:cNvSpPr txBox="1"/>
-          <p:nvPr/>
-        </p:nvSpPr>
-        <p:spPr>
-          <a:xfrm>
-            <a:off x="3767328" y="5715000"/>
-            <a:ext cx="1929384" cy="137160"/>
-          </a:xfrm>
-          <a:prstGeom prst="rect">
-            <a:avLst/>
-          </a:prstGeom>
-          <a:noFill/>
-        </p:spPr>
-        <p:txBody>
-          <a:bodyPr wrap="square">
-            <a:spAutoFit/>
-          </a:bodyPr>
-          <a:lstStyle/>
-          <a:p>
-            <a:pPr>
-              <a:defRPr sz="800" b="0">
-                <a:solidFill>
-                  <a:srgbClr val="5B6979"/>
-                </a:solidFill>
-                <a:latin typeface="Arial" panose="020B0604020202020204"/>
-              </a:defRPr>
-            </a:pPr>
-            <a:r>
-              <a:t>weak premise quality</a:t>
-            </a:r>
-          </a:p>
-        </p:txBody>
-      </p:sp>
-      <p:sp>
-        <p:nvSpPr>
-          <p:cNvPr id="51" name="Rounded Rectangle 50"/>
-          <p:cNvSpPr/>
-          <p:nvPr/>
-        </p:nvSpPr>
-        <p:spPr>
-          <a:xfrm>
-            <a:off x="6355079" y="5074920"/>
-            <a:ext cx="2331720" cy="914400"/>
-          </a:xfrm>
-          <a:prstGeom prst="roundRect">
-            <a:avLst/>
-          </a:prstGeom>
-          <a:solidFill>
-            <a:srgbClr val="F4F7FA"/>
-          </a:solidFill>
-          <a:ln w="12700">
-            <a:solidFill>
-              <a:srgbClr val="DCE2EB"/>
-            </a:solidFill>
-          </a:ln>
-        </p:spPr>
-        <p:style>
-          <a:lnRef idx="1">
-            <a:schemeClr val="accent1"/>
-          </a:lnRef>
-          <a:fillRef idx="3">
-            <a:schemeClr val="accent1"/>
-          </a:fillRef>
-          <a:effectRef idx="2">
-            <a:schemeClr val="accent1"/>
-          </a:effectRef>
-          <a:fontRef idx="minor">
-            <a:schemeClr val="lt1"/>
-          </a:fontRef>
-        </p:style>
-        <p:txBody>
-          <a:bodyPr rtlCol="0" anchor="ctr"/>
-          <a:lstStyle/>
-          <a:p>
-            <a:pPr algn="ctr"/>
-            <a:endParaRPr/>
-          </a:p>
-        </p:txBody>
-      </p:sp>
-      <p:sp>
-        <p:nvSpPr>
-          <p:cNvPr id="52" name="Rectangle 51"/>
-          <p:cNvSpPr/>
-          <p:nvPr/>
-        </p:nvSpPr>
-        <p:spPr>
-          <a:xfrm>
-            <a:off x="6355079" y="5597433"/>
-            <a:ext cx="2331720" cy="54864"/>
-          </a:xfrm>
-          <a:prstGeom prst="rect">
-            <a:avLst/>
-          </a:prstGeom>
-          <a:solidFill>
-            <a:srgbClr val="FF8F00"/>
-          </a:solidFill>
-          <a:ln>
-            <a:solidFill>
-              <a:srgbClr val="FF8F00"/>
-            </a:solidFill>
-          </a:ln>
-        </p:spPr>
-        <p:style>
-          <a:lnRef idx="1">
-            <a:schemeClr val="accent1"/>
-          </a:lnRef>
-          <a:fillRef idx="3">
-            <a:schemeClr val="accent1"/>
-          </a:fillRef>
-          <a:effectRef idx="2">
-            <a:schemeClr val="accent1"/>
-          </a:effectRef>
-          <a:fontRef idx="minor">
-            <a:schemeClr val="lt1"/>
-          </a:fontRef>
-        </p:style>
-        <p:txBody>
-          <a:bodyPr rtlCol="0" anchor="ctr"/>
-          <a:lstStyle/>
-          <a:p>
-            <a:pPr algn="ctr"/>
-            <a:endParaRPr/>
-          </a:p>
-        </p:txBody>
-      </p:sp>
-      <p:sp>
-        <p:nvSpPr>
-          <p:cNvPr id="53" name="TextBox 52"/>
-          <p:cNvSpPr txBox="1"/>
-          <p:nvPr/>
-        </p:nvSpPr>
-        <p:spPr>
-          <a:xfrm>
-            <a:off x="6556247" y="5276088"/>
-            <a:ext cx="1929384" cy="320040"/>
-          </a:xfrm>
-          <a:prstGeom prst="rect">
-            <a:avLst/>
-          </a:prstGeom>
-          <a:noFill/>
-        </p:spPr>
-        <p:txBody>
-          <a:bodyPr wrap="none" anchor="t">
-            <a:spAutoFit/>
-          </a:bodyPr>
-          <a:lstStyle/>
-          <a:p>
-            <a:pPr algn="l">
-              <a:defRPr sz="1000" b="1" i="0">
-                <a:solidFill>
-                  <a:srgbClr val="052646"/>
-                </a:solidFill>
-                <a:latin typeface="Arial" panose="020B0604020202020204"/>
-              </a:defRPr>
-            </a:pPr>
-            <a:r>
-              <a:t>Multi-fact sentences</a:t>
-            </a:r>
-          </a:p>
-        </p:txBody>
-      </p:sp>
-      <p:sp>
-        <p:nvSpPr>
-          <p:cNvPr id="54" name="TextBox 53"/>
-          <p:cNvSpPr txBox="1"/>
-          <p:nvPr/>
-        </p:nvSpPr>
-        <p:spPr>
-          <a:xfrm>
-            <a:off x="6556247" y="5715000"/>
-            <a:ext cx="1929384" cy="137160"/>
-          </a:xfrm>
-          <a:prstGeom prst="rect">
-            <a:avLst/>
-          </a:prstGeom>
-          <a:noFill/>
-        </p:spPr>
-        <p:txBody>
-          <a:bodyPr wrap="square">
-            <a:spAutoFit/>
-          </a:bodyPr>
-          <a:lstStyle/>
-          <a:p>
-            <a:pPr>
-              <a:defRPr sz="800" b="0">
-                <a:solidFill>
-                  <a:srgbClr val="5B6979"/>
-                </a:solidFill>
-                <a:latin typeface="Arial" panose="020B0604020202020204"/>
-              </a:defRPr>
-            </a:pPr>
-            <a:r>
-              <a:t>one sentence contains mixed claims</a:t>
-            </a:r>
-          </a:p>
-        </p:txBody>
-      </p:sp>
-      <p:sp>
-        <p:nvSpPr>
-          <p:cNvPr id="55" name="Rounded Rectangle 54"/>
-          <p:cNvSpPr/>
-          <p:nvPr/>
-        </p:nvSpPr>
-        <p:spPr>
-          <a:xfrm>
-            <a:off x="9143999" y="5074920"/>
-            <a:ext cx="2331720" cy="914400"/>
-          </a:xfrm>
-          <a:prstGeom prst="roundRect">
-            <a:avLst/>
-          </a:prstGeom>
-          <a:solidFill>
-            <a:srgbClr val="F4F7FA"/>
-          </a:solidFill>
-          <a:ln w="12700">
-            <a:solidFill>
-              <a:srgbClr val="DCE2EB"/>
-            </a:solidFill>
-          </a:ln>
-        </p:spPr>
-        <p:style>
-          <a:lnRef idx="1">
-            <a:schemeClr val="accent1"/>
-          </a:lnRef>
-          <a:fillRef idx="3">
-            <a:schemeClr val="accent1"/>
-          </a:fillRef>
-          <a:effectRef idx="2">
-            <a:schemeClr val="accent1"/>
-          </a:effectRef>
-          <a:fontRef idx="minor">
-            <a:schemeClr val="lt1"/>
-          </a:fontRef>
-        </p:style>
-        <p:txBody>
-          <a:bodyPr rtlCol="0" anchor="ctr"/>
-          <a:lstStyle/>
-          <a:p>
-            <a:pPr algn="ctr"/>
-            <a:endParaRPr/>
-          </a:p>
-        </p:txBody>
-      </p:sp>
-      <p:sp>
-        <p:nvSpPr>
-          <p:cNvPr id="56" name="Rectangle 55"/>
-          <p:cNvSpPr/>
-          <p:nvPr/>
-        </p:nvSpPr>
-        <p:spPr>
-          <a:xfrm>
-            <a:off x="9143999" y="5597433"/>
-            <a:ext cx="2331720" cy="54864"/>
-          </a:xfrm>
-          <a:prstGeom prst="rect">
-            <a:avLst/>
-          </a:prstGeom>
-          <a:solidFill>
-            <a:srgbClr val="FF8F00"/>
-          </a:solidFill>
-          <a:ln>
-            <a:solidFill>
-              <a:srgbClr val="FF8F00"/>
-            </a:solidFill>
-          </a:ln>
-        </p:spPr>
-        <p:style>
-          <a:lnRef idx="1">
-            <a:schemeClr val="accent1"/>
-          </a:lnRef>
-          <a:fillRef idx="3">
-            <a:schemeClr val="accent1"/>
-          </a:fillRef>
-          <a:effectRef idx="2">
-            <a:schemeClr val="accent1"/>
-          </a:effectRef>
-          <a:fontRef idx="minor">
-            <a:schemeClr val="lt1"/>
-          </a:fontRef>
-        </p:style>
-        <p:txBody>
-          <a:bodyPr rtlCol="0" anchor="ctr"/>
-          <a:lstStyle/>
-          <a:p>
-            <a:pPr algn="ctr"/>
-            <a:endParaRPr/>
-          </a:p>
-        </p:txBody>
-      </p:sp>
-      <p:sp>
-        <p:nvSpPr>
-          <p:cNvPr id="57" name="TextBox 56"/>
-          <p:cNvSpPr txBox="1"/>
-          <p:nvPr/>
-        </p:nvSpPr>
-        <p:spPr>
-          <a:xfrm>
-            <a:off x="9345167" y="5276088"/>
-            <a:ext cx="1929384" cy="320040"/>
-          </a:xfrm>
-          <a:prstGeom prst="rect">
-            <a:avLst/>
-          </a:prstGeom>
-          <a:noFill/>
-        </p:spPr>
-        <p:txBody>
-          <a:bodyPr wrap="none" anchor="t">
-            <a:spAutoFit/>
-          </a:bodyPr>
-          <a:lstStyle/>
-          <a:p>
-            <a:pPr algn="l">
-              <a:defRPr sz="1000" b="1" i="0">
-                <a:solidFill>
-                  <a:srgbClr val="052646"/>
-                </a:solidFill>
-                <a:latin typeface="Arial" panose="020B0604020202020204"/>
-              </a:defRPr>
-            </a:pPr>
-            <a:r>
-              <a:t>Aggregation sensitivity</a:t>
-            </a:r>
-          </a:p>
-        </p:txBody>
-      </p:sp>
-      <p:sp>
-        <p:nvSpPr>
-          <p:cNvPr id="58" name="TextBox 57"/>
-          <p:cNvSpPr txBox="1"/>
-          <p:nvPr/>
-        </p:nvSpPr>
-        <p:spPr>
-          <a:xfrm>
-            <a:off x="9345167" y="5715000"/>
-            <a:ext cx="1929384" cy="137160"/>
-          </a:xfrm>
-          <a:prstGeom prst="rect">
-            <a:avLst/>
-          </a:prstGeom>
-          <a:noFill/>
-        </p:spPr>
-        <p:txBody>
-          <a:bodyPr wrap="square">
-            <a:spAutoFit/>
-          </a:bodyPr>
-          <a:lstStyle/>
-          <a:p>
-            <a:pPr>
-              <a:defRPr sz="800" b="0">
-                <a:solidFill>
-                  <a:srgbClr val="5B6979"/>
-                </a:solidFill>
-                <a:latin typeface="Arial" panose="020B0604020202020204"/>
-              </a:defRPr>
-            </a:pPr>
-            <a:r>
               <a:t>one wrong refuted label may dominate</a:t>
             </a:r>
           </a:p>
         </p:txBody>
       </p:sp>
+      <p:graphicFrame>
+        <p:nvGraphicFramePr>
+          <p:cNvPr id="6" name="Table 5">
+            <a:extLst>
+              <a:ext uri="{FF2B5EF4-FFF2-40B4-BE49-F238E27FC236}">
+                <a16:creationId xmlns:a16="http://schemas.microsoft.com/office/drawing/2014/main" id="{B9928A22-8E1A-DCA1-19FF-686512E9FBED}"/>
+              </a:ext>
+            </a:extLst>
+          </p:cNvPr>
+          <p:cNvGraphicFramePr>
+            <a:graphicFrameLocks noGrp="1"/>
+          </p:cNvGraphicFramePr>
+          <p:nvPr>
+            <p:extLst>
+              <p:ext uri="{D42A27DB-BD31-4B8C-83A1-F6EECF244321}">
+                <p14:modId xmlns:p14="http://schemas.microsoft.com/office/powerpoint/2010/main" val="3466759098"/>
+              </p:ext>
+            </p:extLst>
+          </p:nvPr>
+        </p:nvGraphicFramePr>
+        <p:xfrm>
+          <a:off x="777240" y="1631696"/>
+          <a:ext cx="10698480" cy="2291080"/>
+        </p:xfrm>
+        <a:graphic>
+          <a:graphicData uri="http://schemas.openxmlformats.org/drawingml/2006/table">
+            <a:tbl>
+              <a:tblPr firstRow="1" bandRow="1">
+                <a:tableStyleId>{6E25E649-3F16-4E02-A733-19D2CDBF48F0}</a:tableStyleId>
+              </a:tblPr>
+              <a:tblGrid>
+                <a:gridCol w="3437710">
+                  <a:extLst>
+                    <a:ext uri="{9D8B030D-6E8A-4147-A177-3AD203B41FA5}">
+                      <a16:colId xmlns:a16="http://schemas.microsoft.com/office/drawing/2014/main" val="1638427238"/>
+                    </a:ext>
+                  </a:extLst>
+                </a:gridCol>
+                <a:gridCol w="1911530">
+                  <a:extLst>
+                    <a:ext uri="{9D8B030D-6E8A-4147-A177-3AD203B41FA5}">
+                      <a16:colId xmlns:a16="http://schemas.microsoft.com/office/drawing/2014/main" val="2179431289"/>
+                    </a:ext>
+                  </a:extLst>
+                </a:gridCol>
+                <a:gridCol w="1911532">
+                  <a:extLst>
+                    <a:ext uri="{9D8B030D-6E8A-4147-A177-3AD203B41FA5}">
+                      <a16:colId xmlns:a16="http://schemas.microsoft.com/office/drawing/2014/main" val="1547524314"/>
+                    </a:ext>
+                  </a:extLst>
+                </a:gridCol>
+                <a:gridCol w="3437708">
+                  <a:extLst>
+                    <a:ext uri="{9D8B030D-6E8A-4147-A177-3AD203B41FA5}">
+                      <a16:colId xmlns:a16="http://schemas.microsoft.com/office/drawing/2014/main" val="3620611687"/>
+                    </a:ext>
+                  </a:extLst>
+                </a:gridCol>
+              </a:tblGrid>
+              <a:tr h="370840">
+                <a:tc>
+                  <a:txBody>
+                    <a:bodyPr/>
+                    <a:lstStyle/>
+                    <a:p>
+                      <a:r>
+                        <a:rPr lang="en-CN" dirty="0"/>
+                        <a:t>Sentence unit</a:t>
+                      </a:r>
+                    </a:p>
+                  </a:txBody>
+                  <a:tcPr/>
+                </a:tc>
+                <a:tc>
+                  <a:txBody>
+                    <a:bodyPr/>
+                    <a:lstStyle/>
+                    <a:p>
+                      <a:r>
+                        <a:rPr lang="en-CN" dirty="0"/>
+                        <a:t>Top evidence</a:t>
+                      </a:r>
+                    </a:p>
+                  </a:txBody>
+                  <a:tcPr/>
+                </a:tc>
+                <a:tc>
+                  <a:txBody>
+                    <a:bodyPr/>
+                    <a:lstStyle/>
+                    <a:p>
+                      <a:r>
+                        <a:rPr lang="en-CN" dirty="0"/>
+                        <a:t>NLI label</a:t>
+                      </a:r>
+                    </a:p>
+                  </a:txBody>
+                  <a:tcPr/>
+                </a:tc>
+                <a:tc>
+                  <a:txBody>
+                    <a:bodyPr/>
+                    <a:lstStyle/>
+                    <a:p>
+                      <a:r>
+                        <a:rPr lang="en-CN" dirty="0"/>
+                        <a:t>Why it matters</a:t>
+                      </a:r>
+                    </a:p>
+                  </a:txBody>
+                  <a:tcPr/>
+                </a:tc>
+                <a:extLst>
+                  <a:ext uri="{0D108BD9-81ED-4DB2-BD59-A6C34878D82A}">
+                    <a16:rowId xmlns:a16="http://schemas.microsoft.com/office/drawing/2014/main" val="2565153806"/>
+                  </a:ext>
+                </a:extLst>
+              </a:tr>
+              <a:tr h="370840">
+                <a:tc>
+                  <a:txBody>
+                    <a:bodyPr/>
+                    <a:lstStyle/>
+                    <a:p>
+                      <a:r>
+                        <a:rPr lang="en-CN" dirty="0"/>
+                        <a:t>Brockman disclosed financial ties and a nearly $30B stake. </a:t>
+                      </a:r>
+                    </a:p>
+                  </a:txBody>
+                  <a:tcPr/>
+                </a:tc>
+                <a:tc>
+                  <a:txBody>
+                    <a:bodyPr/>
+                    <a:lstStyle/>
+                    <a:p>
+                      <a:r>
+                        <a:rPr lang="en-CN" dirty="0"/>
+                        <a:t>Reuters</a:t>
+                      </a:r>
+                    </a:p>
+                  </a:txBody>
+                  <a:tcPr/>
+                </a:tc>
+                <a:tc>
+                  <a:txBody>
+                    <a:bodyPr/>
+                    <a:lstStyle/>
+                    <a:p>
+                      <a:r>
+                        <a:rPr lang="en-CN" dirty="0">
+                          <a:solidFill>
+                            <a:srgbClr val="00B050"/>
+                          </a:solidFill>
+                        </a:rPr>
+                        <a:t>Supported</a:t>
+                      </a:r>
+                    </a:p>
+                  </a:txBody>
+                  <a:tcPr/>
+                </a:tc>
+                <a:tc>
+                  <a:txBody>
+                    <a:bodyPr/>
+                    <a:lstStyle/>
+                    <a:p>
+                      <a:r>
+                        <a:rPr lang="en-CN" dirty="0"/>
+                        <a:t>Strong evidence match for financial-interest statement. </a:t>
+                      </a:r>
+                    </a:p>
+                  </a:txBody>
+                  <a:tcPr/>
+                </a:tc>
+                <a:extLst>
+                  <a:ext uri="{0D108BD9-81ED-4DB2-BD59-A6C34878D82A}">
+                    <a16:rowId xmlns:a16="http://schemas.microsoft.com/office/drawing/2014/main" val="79072548"/>
+                  </a:ext>
+                </a:extLst>
+              </a:tr>
+              <a:tr h="370840">
+                <a:tc>
+                  <a:txBody>
+                    <a:bodyPr/>
+                    <a:lstStyle/>
+                    <a:p>
+                      <a:r>
+                        <a:rPr lang="en-CN" dirty="0"/>
+                        <a:t>Musk filed a lawsuit over the for-profit versus nonprofit issue. </a:t>
+                      </a:r>
+                    </a:p>
+                  </a:txBody>
+                  <a:tcPr/>
+                </a:tc>
+                <a:tc>
+                  <a:txBody>
+                    <a:bodyPr/>
+                    <a:lstStyle/>
+                    <a:p>
+                      <a:r>
+                        <a:rPr lang="en-CN" dirty="0"/>
+                        <a:t>Economic Times</a:t>
+                      </a:r>
+                    </a:p>
+                  </a:txBody>
+                  <a:tcPr/>
+                </a:tc>
+                <a:tc>
+                  <a:txBody>
+                    <a:bodyPr/>
+                    <a:lstStyle/>
+                    <a:p>
+                      <a:r>
+                        <a:rPr lang="en-CN" dirty="0">
+                          <a:solidFill>
+                            <a:srgbClr val="00B050"/>
+                          </a:solidFill>
+                        </a:rPr>
+                        <a:t>Supported</a:t>
+                      </a:r>
+                    </a:p>
+                  </a:txBody>
+                  <a:tcPr/>
+                </a:tc>
+                <a:tc>
+                  <a:txBody>
+                    <a:bodyPr/>
+                    <a:lstStyle/>
+                    <a:p>
+                      <a:r>
+                        <a:rPr lang="en-CN" dirty="0"/>
+                        <a:t>Evidence directly addresses litigation context. </a:t>
+                      </a:r>
+                    </a:p>
+                  </a:txBody>
+                  <a:tcPr/>
+                </a:tc>
+                <a:extLst>
+                  <a:ext uri="{0D108BD9-81ED-4DB2-BD59-A6C34878D82A}">
+                    <a16:rowId xmlns:a16="http://schemas.microsoft.com/office/drawing/2014/main" val="3654916463"/>
+                  </a:ext>
+                </a:extLst>
+              </a:tr>
+              <a:tr h="370840">
+                <a:tc>
+                  <a:txBody>
+                    <a:bodyPr/>
+                    <a:lstStyle/>
+                    <a:p>
+                      <a:r>
+                        <a:rPr lang="en-CN" dirty="0"/>
+                        <a:t>The trial and ChatGPT launch happened in 2022. </a:t>
+                      </a:r>
+                    </a:p>
+                  </a:txBody>
+                  <a:tcPr/>
+                </a:tc>
+                <a:tc>
+                  <a:txBody>
+                    <a:bodyPr/>
+                    <a:lstStyle/>
+                    <a:p>
+                      <a:r>
+                        <a:rPr lang="en-CN" dirty="0"/>
+                        <a:t>MarketScreener</a:t>
+                      </a:r>
+                    </a:p>
+                  </a:txBody>
+                  <a:tcPr/>
+                </a:tc>
+                <a:tc>
+                  <a:txBody>
+                    <a:bodyPr/>
+                    <a:lstStyle/>
+                    <a:p>
+                      <a:r>
+                        <a:rPr lang="en-CN" dirty="0">
+                          <a:solidFill>
+                            <a:srgbClr val="00B050"/>
+                          </a:solidFill>
+                        </a:rPr>
+                        <a:t>NEI → Supported</a:t>
+                      </a:r>
+                    </a:p>
+                  </a:txBody>
+                  <a:tcPr/>
+                </a:tc>
+                <a:tc>
+                  <a:txBody>
+                    <a:bodyPr/>
+                    <a:lstStyle/>
+                    <a:p>
+                      <a:r>
+                        <a:rPr lang="en-CN" dirty="0"/>
+                        <a:t>NLI helps avoid overreacting to unrelated numbers. </a:t>
+                      </a:r>
+                    </a:p>
+                  </a:txBody>
+                  <a:tcPr/>
+                </a:tc>
+                <a:extLst>
+                  <a:ext uri="{0D108BD9-81ED-4DB2-BD59-A6C34878D82A}">
+                    <a16:rowId xmlns:a16="http://schemas.microsoft.com/office/drawing/2014/main" val="3173554681"/>
+                  </a:ext>
+                </a:extLst>
+              </a:tr>
+            </a:tbl>
+          </a:graphicData>
+        </a:graphic>
+      </p:graphicFrame>
     </p:spTree>
   </p:cSld>
   <p:clrMapOvr>
@@ -15663,6 +14666,1271 @@
 </file>
 
 <file path=ppt/slides/slide16.xml><?xml version="1.0" encoding="utf-8"?>
+<p:sld xmlns:a="http://schemas.openxmlformats.org/drawingml/2006/main" xmlns:r="http://schemas.openxmlformats.org/officeDocument/2006/relationships" xmlns:p="http://schemas.openxmlformats.org/presentationml/2006/main">
+  <p:cSld>
+    <p:spTree>
+      <p:nvGrpSpPr>
+        <p:cNvPr id="1" name="">
+          <a:extLst>
+            <a:ext uri="{FF2B5EF4-FFF2-40B4-BE49-F238E27FC236}">
+              <a16:creationId xmlns:a16="http://schemas.microsoft.com/office/drawing/2014/main" id="{205F9EE2-8872-50B1-DAB7-9F08FB82E0B2}"/>
+            </a:ext>
+          </a:extLst>
+        </p:cNvPr>
+        <p:cNvGrpSpPr/>
+        <p:nvPr/>
+      </p:nvGrpSpPr>
+      <p:grpSpPr>
+        <a:xfrm>
+          <a:off x="0" y="0"/>
+          <a:ext cx="0" cy="0"/>
+          <a:chOff x="0" y="0"/>
+          <a:chExt cx="0" cy="0"/>
+        </a:xfrm>
+      </p:grpSpPr>
+      <p:sp>
+        <p:nvSpPr>
+          <p:cNvPr id="2" name="Rectangle 1">
+            <a:extLst>
+              <a:ext uri="{FF2B5EF4-FFF2-40B4-BE49-F238E27FC236}">
+                <a16:creationId xmlns:a16="http://schemas.microsoft.com/office/drawing/2014/main" id="{8505340E-7561-0183-249C-BE3BEF1A747A}"/>
+              </a:ext>
+            </a:extLst>
+          </p:cNvPr>
+          <p:cNvSpPr/>
+          <p:nvPr/>
+        </p:nvSpPr>
+        <p:spPr>
+          <a:xfrm>
+            <a:off x="0" y="0"/>
+            <a:ext cx="12191695" cy="64008"/>
+          </a:xfrm>
+          <a:prstGeom prst="rect">
+            <a:avLst/>
+          </a:prstGeom>
+          <a:solidFill>
+            <a:srgbClr val="052646"/>
+          </a:solidFill>
+          <a:ln>
+            <a:solidFill>
+              <a:srgbClr val="052646"/>
+            </a:solidFill>
+          </a:ln>
+        </p:spPr>
+        <p:style>
+          <a:lnRef idx="1">
+            <a:schemeClr val="accent1"/>
+          </a:lnRef>
+          <a:fillRef idx="3">
+            <a:schemeClr val="accent1"/>
+          </a:fillRef>
+          <a:effectRef idx="2">
+            <a:schemeClr val="accent1"/>
+          </a:effectRef>
+          <a:fontRef idx="minor">
+            <a:schemeClr val="lt1"/>
+          </a:fontRef>
+        </p:style>
+        <p:txBody>
+          <a:bodyPr rtlCol="0" anchor="ctr"/>
+          <a:lstStyle/>
+          <a:p>
+            <a:pPr algn="ctr"/>
+            <a:endParaRPr/>
+          </a:p>
+        </p:txBody>
+      </p:sp>
+      <p:sp>
+        <p:nvSpPr>
+          <p:cNvPr id="3" name="Rectangle 2">
+            <a:extLst>
+              <a:ext uri="{FF2B5EF4-FFF2-40B4-BE49-F238E27FC236}">
+                <a16:creationId xmlns:a16="http://schemas.microsoft.com/office/drawing/2014/main" id="{D9D3B563-3223-75D8-3788-67CC670A9E56}"/>
+              </a:ext>
+            </a:extLst>
+          </p:cNvPr>
+          <p:cNvSpPr/>
+          <p:nvPr/>
+        </p:nvSpPr>
+        <p:spPr>
+          <a:xfrm>
+            <a:off x="0" y="64008"/>
+            <a:ext cx="12191695" cy="18288"/>
+          </a:xfrm>
+          <a:prstGeom prst="rect">
+            <a:avLst/>
+          </a:prstGeom>
+          <a:solidFill>
+            <a:srgbClr val="FF8F00"/>
+          </a:solidFill>
+          <a:ln>
+            <a:solidFill>
+              <a:srgbClr val="FF8F00"/>
+            </a:solidFill>
+          </a:ln>
+        </p:spPr>
+        <p:style>
+          <a:lnRef idx="1">
+            <a:schemeClr val="accent1"/>
+          </a:lnRef>
+          <a:fillRef idx="3">
+            <a:schemeClr val="accent1"/>
+          </a:fillRef>
+          <a:effectRef idx="2">
+            <a:schemeClr val="accent1"/>
+          </a:effectRef>
+          <a:fontRef idx="minor">
+            <a:schemeClr val="lt1"/>
+          </a:fontRef>
+        </p:style>
+        <p:txBody>
+          <a:bodyPr rtlCol="0" anchor="ctr"/>
+          <a:lstStyle/>
+          <a:p>
+            <a:pPr algn="ctr"/>
+            <a:endParaRPr/>
+          </a:p>
+        </p:txBody>
+      </p:sp>
+      <p:sp>
+        <p:nvSpPr>
+          <p:cNvPr id="4" name="Rectangle 3">
+            <a:extLst>
+              <a:ext uri="{FF2B5EF4-FFF2-40B4-BE49-F238E27FC236}">
+                <a16:creationId xmlns:a16="http://schemas.microsoft.com/office/drawing/2014/main" id="{74217149-F712-AEB3-01B9-B38D05FF44CE}"/>
+              </a:ext>
+            </a:extLst>
+          </p:cNvPr>
+          <p:cNvSpPr/>
+          <p:nvPr/>
+        </p:nvSpPr>
+        <p:spPr>
+          <a:xfrm>
+            <a:off x="411480" y="402336"/>
+            <a:ext cx="54864" cy="502920"/>
+          </a:xfrm>
+          <a:prstGeom prst="rect">
+            <a:avLst/>
+          </a:prstGeom>
+          <a:solidFill>
+            <a:srgbClr val="FF8F00"/>
+          </a:solidFill>
+          <a:ln>
+            <a:solidFill>
+              <a:srgbClr val="FF8F00"/>
+            </a:solidFill>
+          </a:ln>
+        </p:spPr>
+        <p:style>
+          <a:lnRef idx="1">
+            <a:schemeClr val="accent1"/>
+          </a:lnRef>
+          <a:fillRef idx="3">
+            <a:schemeClr val="accent1"/>
+          </a:fillRef>
+          <a:effectRef idx="2">
+            <a:schemeClr val="accent1"/>
+          </a:effectRef>
+          <a:fontRef idx="minor">
+            <a:schemeClr val="lt1"/>
+          </a:fontRef>
+        </p:style>
+        <p:txBody>
+          <a:bodyPr rtlCol="0" anchor="ctr"/>
+          <a:lstStyle/>
+          <a:p>
+            <a:pPr algn="ctr"/>
+            <a:endParaRPr/>
+          </a:p>
+        </p:txBody>
+      </p:sp>
+      <p:sp>
+        <p:nvSpPr>
+          <p:cNvPr id="5" name="TextBox 4">
+            <a:extLst>
+              <a:ext uri="{FF2B5EF4-FFF2-40B4-BE49-F238E27FC236}">
+                <a16:creationId xmlns:a16="http://schemas.microsoft.com/office/drawing/2014/main" id="{7FAD66DC-8851-D4A6-1EAF-A4C564B923D7}"/>
+              </a:ext>
+            </a:extLst>
+          </p:cNvPr>
+          <p:cNvSpPr txBox="1"/>
+          <p:nvPr/>
+        </p:nvSpPr>
+        <p:spPr>
+          <a:xfrm>
+            <a:off x="566928" y="320040"/>
+            <a:ext cx="7047057" cy="477054"/>
+          </a:xfrm>
+          <a:prstGeom prst="rect">
+            <a:avLst/>
+          </a:prstGeom>
+          <a:noFill/>
+        </p:spPr>
+        <p:txBody>
+          <a:bodyPr wrap="none" anchor="t">
+            <a:spAutoFit/>
+          </a:bodyPr>
+          <a:lstStyle/>
+          <a:p>
+            <a:pPr>
+              <a:defRPr sz="2500" b="1" i="0">
+                <a:solidFill>
+                  <a:srgbClr val="052646"/>
+                </a:solidFill>
+                <a:latin typeface="Arial" panose="020B0604020202020204"/>
+              </a:defRPr>
+            </a:pPr>
+            <a:r>
+              <a:rPr lang="en-US" sz="2500" b="1" dirty="0"/>
+              <a:t>Demo: End-to-end Evidence Trail in </a:t>
+            </a:r>
+            <a:r>
+              <a:rPr lang="en-US" sz="2500" b="1" dirty="0" err="1"/>
+              <a:t>Streamlit</a:t>
+            </a:r>
+            <a:endParaRPr dirty="0"/>
+          </a:p>
+        </p:txBody>
+      </p:sp>
+      <p:sp>
+        <p:nvSpPr>
+          <p:cNvPr id="9" name="TextBox 8">
+            <a:extLst>
+              <a:ext uri="{FF2B5EF4-FFF2-40B4-BE49-F238E27FC236}">
+                <a16:creationId xmlns:a16="http://schemas.microsoft.com/office/drawing/2014/main" id="{26B2B754-2FC1-0772-C4FF-30EE2AB7794F}"/>
+              </a:ext>
+            </a:extLst>
+          </p:cNvPr>
+          <p:cNvSpPr txBox="1"/>
+          <p:nvPr/>
+        </p:nvSpPr>
+        <p:spPr>
+          <a:xfrm>
+            <a:off x="11612880" y="6519672"/>
+            <a:ext cx="274320" cy="182880"/>
+          </a:xfrm>
+          <a:prstGeom prst="rect">
+            <a:avLst/>
+          </a:prstGeom>
+          <a:noFill/>
+        </p:spPr>
+        <p:txBody>
+          <a:bodyPr wrap="none" anchor="t">
+            <a:spAutoFit/>
+          </a:bodyPr>
+          <a:lstStyle/>
+          <a:p>
+            <a:pPr algn="r">
+              <a:defRPr sz="700" b="0" i="0">
+                <a:solidFill>
+                  <a:srgbClr val="5B6979"/>
+                </a:solidFill>
+                <a:latin typeface="Arial" panose="020B0604020202020204"/>
+              </a:defRPr>
+            </a:pPr>
+            <a:r>
+              <a:t>17</a:t>
+            </a:r>
+          </a:p>
+        </p:txBody>
+      </p:sp>
+      <p:pic>
+        <p:nvPicPr>
+          <p:cNvPr id="14" name="Picture 13">
+            <a:extLst>
+              <a:ext uri="{FF2B5EF4-FFF2-40B4-BE49-F238E27FC236}">
+                <a16:creationId xmlns:a16="http://schemas.microsoft.com/office/drawing/2014/main" id="{B8D78F69-E447-8B20-168D-A851D66160CA}"/>
+              </a:ext>
+            </a:extLst>
+          </p:cNvPr>
+          <p:cNvPicPr>
+            <a:picLocks noChangeAspect="1"/>
+          </p:cNvPicPr>
+          <p:nvPr/>
+        </p:nvPicPr>
+        <p:blipFill>
+          <a:blip r:embed="rId17"/>
+          <a:srcRect t="4357"/>
+          <a:stretch>
+            <a:fillRect/>
+          </a:stretch>
+        </p:blipFill>
+        <p:spPr>
+          <a:xfrm>
+            <a:off x="8145068" y="1554450"/>
+            <a:ext cx="3353340" cy="3160216"/>
+          </a:xfrm>
+          <a:prstGeom prst="rect">
+            <a:avLst/>
+          </a:prstGeom>
+          <a:ln>
+            <a:solidFill>
+              <a:schemeClr val="bg1">
+                <a:lumMod val="50000"/>
+              </a:schemeClr>
+            </a:solidFill>
+          </a:ln>
+        </p:spPr>
+      </p:pic>
+      <p:sp>
+        <p:nvSpPr>
+          <p:cNvPr id="7" name="TextBox 6">
+            <a:extLst>
+              <a:ext uri="{FF2B5EF4-FFF2-40B4-BE49-F238E27FC236}">
+                <a16:creationId xmlns:a16="http://schemas.microsoft.com/office/drawing/2014/main" id="{A7020AA6-67B2-27F1-1611-BA99177B622F}"/>
+              </a:ext>
+            </a:extLst>
+          </p:cNvPr>
+          <p:cNvSpPr txBox="1"/>
+          <p:nvPr/>
+        </p:nvSpPr>
+        <p:spPr>
+          <a:xfrm>
+            <a:off x="685800" y="922108"/>
+            <a:ext cx="10812608" cy="584775"/>
+          </a:xfrm>
+          <a:prstGeom prst="rect">
+            <a:avLst/>
+          </a:prstGeom>
+          <a:noFill/>
+        </p:spPr>
+        <p:txBody>
+          <a:bodyPr wrap="square" anchor="t">
+            <a:spAutoFit/>
+          </a:bodyPr>
+          <a:lstStyle/>
+          <a:p>
+            <a:pPr algn="l">
+              <a:defRPr sz="1600" b="0" i="0">
+                <a:solidFill>
+                  <a:srgbClr val="5B6979"/>
+                </a:solidFill>
+                <a:latin typeface="Arial" panose="020B0604020202020204"/>
+              </a:defRPr>
+            </a:pPr>
+            <a:r>
+              <a:rPr lang="en-US" dirty="0"/>
+              <a:t>A single article run shows how the app moves from input and BERT prior to sentence-level evidence, final verdict, sentiment, and chat interaction. </a:t>
+            </a:r>
+          </a:p>
+        </p:txBody>
+      </p:sp>
+      <p:pic>
+        <p:nvPicPr>
+          <p:cNvPr id="10" name="Picture 9">
+            <a:extLst>
+              <a:ext uri="{FF2B5EF4-FFF2-40B4-BE49-F238E27FC236}">
+                <a16:creationId xmlns:a16="http://schemas.microsoft.com/office/drawing/2014/main" id="{40286C67-619A-726B-67B8-67D043F86309}"/>
+              </a:ext>
+            </a:extLst>
+          </p:cNvPr>
+          <p:cNvPicPr>
+            <a:picLocks noChangeAspect="1"/>
+          </p:cNvPicPr>
+          <p:nvPr/>
+        </p:nvPicPr>
+        <p:blipFill>
+          <a:blip r:embed="rId18"/>
+          <a:stretch>
+            <a:fillRect/>
+          </a:stretch>
+        </p:blipFill>
+        <p:spPr>
+          <a:xfrm>
+            <a:off x="685801" y="2165426"/>
+            <a:ext cx="3353340" cy="2549240"/>
+          </a:xfrm>
+          <a:prstGeom prst="rect">
+            <a:avLst/>
+          </a:prstGeom>
+          <a:ln>
+            <a:solidFill>
+              <a:schemeClr val="bg1">
+                <a:lumMod val="50000"/>
+              </a:schemeClr>
+            </a:solidFill>
+          </a:ln>
+        </p:spPr>
+      </p:pic>
+      <p:pic>
+        <p:nvPicPr>
+          <p:cNvPr id="12" name="Picture 11">
+            <a:extLst>
+              <a:ext uri="{FF2B5EF4-FFF2-40B4-BE49-F238E27FC236}">
+                <a16:creationId xmlns:a16="http://schemas.microsoft.com/office/drawing/2014/main" id="{8B512DCA-8B32-36E8-E8D0-06C1CED0798F}"/>
+              </a:ext>
+            </a:extLst>
+          </p:cNvPr>
+          <p:cNvPicPr>
+            <a:picLocks noChangeAspect="1"/>
+          </p:cNvPicPr>
+          <p:nvPr/>
+        </p:nvPicPr>
+        <p:blipFill>
+          <a:blip r:embed="rId19"/>
+          <a:srcRect/>
+          <a:stretch>
+            <a:fillRect/>
+          </a:stretch>
+        </p:blipFill>
+        <p:spPr>
+          <a:xfrm>
+            <a:off x="4415434" y="1554450"/>
+            <a:ext cx="3353340" cy="3160216"/>
+          </a:xfrm>
+          <a:prstGeom prst="rect">
+            <a:avLst/>
+          </a:prstGeom>
+          <a:ln>
+            <a:solidFill>
+              <a:schemeClr val="bg1">
+                <a:lumMod val="50000"/>
+              </a:schemeClr>
+            </a:solidFill>
+          </a:ln>
+        </p:spPr>
+      </p:pic>
+      <p:grpSp>
+        <p:nvGrpSpPr>
+          <p:cNvPr id="15" name="Group 14">
+            <a:extLst>
+              <a:ext uri="{FF2B5EF4-FFF2-40B4-BE49-F238E27FC236}">
+                <a16:creationId xmlns:a16="http://schemas.microsoft.com/office/drawing/2014/main" id="{0CE37FE3-1B2E-A77D-79A8-A24E1AEA4478}"/>
+              </a:ext>
+            </a:extLst>
+          </p:cNvPr>
+          <p:cNvGrpSpPr/>
+          <p:nvPr/>
+        </p:nvGrpSpPr>
+        <p:grpSpPr>
+          <a:xfrm>
+            <a:off x="685800" y="4884484"/>
+            <a:ext cx="3353341" cy="1451182"/>
+            <a:chOff x="685800" y="1417320"/>
+            <a:chExt cx="3200400" cy="2111104"/>
+          </a:xfrm>
+        </p:grpSpPr>
+        <p:sp>
+          <p:nvSpPr>
+            <p:cNvPr id="16" name="Rounded Rectangle 15">
+              <a:extLst>
+                <a:ext uri="{FF2B5EF4-FFF2-40B4-BE49-F238E27FC236}">
+                  <a16:creationId xmlns:a16="http://schemas.microsoft.com/office/drawing/2014/main" id="{BCF78283-BD36-DFC0-27A7-453541960951}"/>
+                </a:ext>
+              </a:extLst>
+            </p:cNvPr>
+            <p:cNvSpPr/>
+            <p:nvPr>
+              <p:custDataLst>
+                <p:tags r:id="rId11"/>
+              </p:custDataLst>
+            </p:nvPr>
+          </p:nvSpPr>
+          <p:spPr>
+            <a:xfrm>
+              <a:off x="685800" y="1417320"/>
+              <a:ext cx="3200400" cy="1965960"/>
+            </a:xfrm>
+            <a:prstGeom prst="roundRect">
+              <a:avLst/>
+            </a:prstGeom>
+            <a:solidFill>
+              <a:srgbClr val="F4F7FA"/>
+            </a:solidFill>
+            <a:ln w="12700">
+              <a:solidFill>
+                <a:srgbClr val="DCE2EB"/>
+              </a:solidFill>
+            </a:ln>
+          </p:spPr>
+          <p:style>
+            <a:lnRef idx="1">
+              <a:schemeClr val="accent1"/>
+            </a:lnRef>
+            <a:fillRef idx="3">
+              <a:schemeClr val="accent1"/>
+            </a:fillRef>
+            <a:effectRef idx="2">
+              <a:schemeClr val="accent1"/>
+            </a:effectRef>
+            <a:fontRef idx="minor">
+              <a:schemeClr val="lt1"/>
+            </a:fontRef>
+          </p:style>
+          <p:txBody>
+            <a:bodyPr rtlCol="0" anchor="ctr"/>
+            <a:lstStyle/>
+            <a:p>
+              <a:pPr algn="ctr"/>
+              <a:endParaRPr/>
+            </a:p>
+          </p:txBody>
+        </p:sp>
+        <p:sp>
+          <p:nvSpPr>
+            <p:cNvPr id="17" name="Rectangle 16">
+              <a:extLst>
+                <a:ext uri="{FF2B5EF4-FFF2-40B4-BE49-F238E27FC236}">
+                  <a16:creationId xmlns:a16="http://schemas.microsoft.com/office/drawing/2014/main" id="{E96ED39F-7EDF-6BB0-CC68-F54C2F308D6D}"/>
+                </a:ext>
+              </a:extLst>
+            </p:cNvPr>
+            <p:cNvSpPr/>
+            <p:nvPr>
+              <p:custDataLst>
+                <p:tags r:id="rId12"/>
+              </p:custDataLst>
+            </p:nvPr>
+          </p:nvSpPr>
+          <p:spPr>
+            <a:xfrm>
+              <a:off x="685800" y="2151200"/>
+              <a:ext cx="3200400" cy="54864"/>
+            </a:xfrm>
+            <a:prstGeom prst="rect">
+              <a:avLst/>
+            </a:prstGeom>
+            <a:solidFill>
+              <a:srgbClr val="266FB4"/>
+            </a:solidFill>
+            <a:ln>
+              <a:solidFill>
+                <a:srgbClr val="266FB4"/>
+              </a:solidFill>
+            </a:ln>
+          </p:spPr>
+          <p:style>
+            <a:lnRef idx="1">
+              <a:schemeClr val="accent1"/>
+            </a:lnRef>
+            <a:fillRef idx="3">
+              <a:schemeClr val="accent1"/>
+            </a:fillRef>
+            <a:effectRef idx="2">
+              <a:schemeClr val="accent1"/>
+            </a:effectRef>
+            <a:fontRef idx="minor">
+              <a:schemeClr val="lt1"/>
+            </a:fontRef>
+          </p:style>
+          <p:txBody>
+            <a:bodyPr rtlCol="0" anchor="ctr"/>
+            <a:lstStyle/>
+            <a:p>
+              <a:pPr algn="ctr"/>
+              <a:endParaRPr/>
+            </a:p>
+          </p:txBody>
+        </p:sp>
+        <p:sp>
+          <p:nvSpPr>
+            <p:cNvPr id="18" name="TextBox 17">
+              <a:extLst>
+                <a:ext uri="{FF2B5EF4-FFF2-40B4-BE49-F238E27FC236}">
+                  <a16:creationId xmlns:a16="http://schemas.microsoft.com/office/drawing/2014/main" id="{F4AFDA99-2D53-8482-847C-8403CAE01A27}"/>
+                </a:ext>
+              </a:extLst>
+            </p:cNvPr>
+            <p:cNvSpPr txBox="1"/>
+            <p:nvPr>
+              <p:custDataLst>
+                <p:tags r:id="rId13"/>
+              </p:custDataLst>
+            </p:nvPr>
+          </p:nvSpPr>
+          <p:spPr>
+            <a:xfrm>
+              <a:off x="886968" y="1618488"/>
+              <a:ext cx="2436258" cy="470124"/>
+            </a:xfrm>
+            <a:prstGeom prst="rect">
+              <a:avLst/>
+            </a:prstGeom>
+            <a:noFill/>
+          </p:spPr>
+          <p:txBody>
+            <a:bodyPr wrap="none" anchor="t">
+              <a:spAutoFit/>
+            </a:bodyPr>
+            <a:lstStyle/>
+            <a:p>
+              <a:pPr algn="l">
+                <a:defRPr sz="1500" b="1" i="0">
+                  <a:solidFill>
+                    <a:srgbClr val="052646"/>
+                  </a:solidFill>
+                  <a:latin typeface="Arial" panose="020B0604020202020204"/>
+                </a:defRPr>
+              </a:pPr>
+              <a:r>
+                <a:rPr lang="en-US" dirty="0"/>
+                <a:t>Article input + verdict</a:t>
+              </a:r>
+              <a:endParaRPr dirty="0"/>
+            </a:p>
+          </p:txBody>
+        </p:sp>
+        <p:sp>
+          <p:nvSpPr>
+            <p:cNvPr id="19" name="TextBox 18">
+              <a:extLst>
+                <a:ext uri="{FF2B5EF4-FFF2-40B4-BE49-F238E27FC236}">
+                  <a16:creationId xmlns:a16="http://schemas.microsoft.com/office/drawing/2014/main" id="{7A137B75-3790-C419-34FD-7218E9B39D54}"/>
+                </a:ext>
+              </a:extLst>
+            </p:cNvPr>
+            <p:cNvSpPr txBox="1"/>
+            <p:nvPr>
+              <p:custDataLst>
+                <p:tags r:id="rId14"/>
+              </p:custDataLst>
+            </p:nvPr>
+          </p:nvSpPr>
+          <p:spPr>
+            <a:xfrm>
+              <a:off x="886968" y="2319532"/>
+              <a:ext cx="2798065" cy="1208892"/>
+            </a:xfrm>
+            <a:prstGeom prst="rect">
+              <a:avLst/>
+            </a:prstGeom>
+            <a:noFill/>
+          </p:spPr>
+          <p:txBody>
+            <a:bodyPr wrap="square">
+              <a:spAutoFit/>
+            </a:bodyPr>
+            <a:lstStyle/>
+            <a:p>
+              <a:pPr>
+                <a:defRPr sz="1100" b="0">
+                  <a:solidFill>
+                    <a:srgbClr val="5B6979"/>
+                  </a:solidFill>
+                  <a:latin typeface="Arial" panose="020B0604020202020204"/>
+                </a:defRPr>
+              </a:pPr>
+              <a:r>
+                <a:rPr lang="en-US" sz="1200" dirty="0"/>
+                <a:t>The app returns Likely True, confidence, supported/refuted/NEI counts, and media sentiment. </a:t>
+              </a:r>
+              <a:endParaRPr sz="1200" dirty="0"/>
+            </a:p>
+          </p:txBody>
+        </p:sp>
+        <p:sp>
+          <p:nvSpPr>
+            <p:cNvPr id="20" name="TextBox 19">
+              <a:extLst>
+                <a:ext uri="{FF2B5EF4-FFF2-40B4-BE49-F238E27FC236}">
+                  <a16:creationId xmlns:a16="http://schemas.microsoft.com/office/drawing/2014/main" id="{49EA7E1C-CA62-C9B9-6795-88AF4F632B01}"/>
+                </a:ext>
+              </a:extLst>
+            </p:cNvPr>
+            <p:cNvSpPr txBox="1"/>
+            <p:nvPr>
+              <p:custDataLst>
+                <p:tags r:id="rId15"/>
+              </p:custDataLst>
+            </p:nvPr>
+          </p:nvSpPr>
+          <p:spPr>
+            <a:xfrm>
+              <a:off x="868680" y="1463040"/>
+              <a:ext cx="822960" cy="201168"/>
+            </a:xfrm>
+            <a:prstGeom prst="rect">
+              <a:avLst/>
+            </a:prstGeom>
+            <a:noFill/>
+          </p:spPr>
+          <p:txBody>
+            <a:bodyPr wrap="none" anchor="t">
+              <a:spAutoFit/>
+            </a:bodyPr>
+            <a:lstStyle/>
+            <a:p>
+              <a:pPr algn="l">
+                <a:defRPr sz="900" b="1" i="0">
+                  <a:solidFill>
+                    <a:srgbClr val="266FB4"/>
+                  </a:solidFill>
+                  <a:latin typeface="Arial" panose="020B0604020202020204"/>
+                </a:defRPr>
+              </a:pPr>
+              <a:r>
+                <a:t>STEP 01</a:t>
+              </a:r>
+            </a:p>
+          </p:txBody>
+        </p:sp>
+      </p:grpSp>
+      <p:grpSp>
+        <p:nvGrpSpPr>
+          <p:cNvPr id="21" name="Group 20">
+            <a:extLst>
+              <a:ext uri="{FF2B5EF4-FFF2-40B4-BE49-F238E27FC236}">
+                <a16:creationId xmlns:a16="http://schemas.microsoft.com/office/drawing/2014/main" id="{A57D7634-B744-5042-DFB3-DBC9BEBA3590}"/>
+              </a:ext>
+            </a:extLst>
+          </p:cNvPr>
+          <p:cNvGrpSpPr/>
+          <p:nvPr/>
+        </p:nvGrpSpPr>
+        <p:grpSpPr>
+          <a:xfrm>
+            <a:off x="4415434" y="4884484"/>
+            <a:ext cx="3353340" cy="1351409"/>
+            <a:chOff x="4416552" y="1417320"/>
+            <a:chExt cx="3200400" cy="1965960"/>
+          </a:xfrm>
+        </p:grpSpPr>
+        <p:sp>
+          <p:nvSpPr>
+            <p:cNvPr id="22" name="Rounded Rectangle 21">
+              <a:extLst>
+                <a:ext uri="{FF2B5EF4-FFF2-40B4-BE49-F238E27FC236}">
+                  <a16:creationId xmlns:a16="http://schemas.microsoft.com/office/drawing/2014/main" id="{4E7219D1-E36E-5A96-D2E5-B27D6E91522E}"/>
+                </a:ext>
+              </a:extLst>
+            </p:cNvPr>
+            <p:cNvSpPr/>
+            <p:nvPr>
+              <p:custDataLst>
+                <p:tags r:id="rId6"/>
+              </p:custDataLst>
+            </p:nvPr>
+          </p:nvSpPr>
+          <p:spPr>
+            <a:xfrm>
+              <a:off x="4416552" y="1417320"/>
+              <a:ext cx="3200400" cy="1965960"/>
+            </a:xfrm>
+            <a:prstGeom prst="roundRect">
+              <a:avLst/>
+            </a:prstGeom>
+            <a:solidFill>
+              <a:srgbClr val="F4F7FA"/>
+            </a:solidFill>
+            <a:ln w="12700">
+              <a:solidFill>
+                <a:srgbClr val="DCE2EB"/>
+              </a:solidFill>
+            </a:ln>
+          </p:spPr>
+          <p:style>
+            <a:lnRef idx="1">
+              <a:schemeClr val="accent1"/>
+            </a:lnRef>
+            <a:fillRef idx="3">
+              <a:schemeClr val="accent1"/>
+            </a:fillRef>
+            <a:effectRef idx="2">
+              <a:schemeClr val="accent1"/>
+            </a:effectRef>
+            <a:fontRef idx="minor">
+              <a:schemeClr val="lt1"/>
+            </a:fontRef>
+          </p:style>
+          <p:txBody>
+            <a:bodyPr rtlCol="0" anchor="ctr"/>
+            <a:lstStyle/>
+            <a:p>
+              <a:pPr algn="ctr"/>
+              <a:endParaRPr/>
+            </a:p>
+          </p:txBody>
+        </p:sp>
+        <p:sp>
+          <p:nvSpPr>
+            <p:cNvPr id="23" name="Rectangle 22">
+              <a:extLst>
+                <a:ext uri="{FF2B5EF4-FFF2-40B4-BE49-F238E27FC236}">
+                  <a16:creationId xmlns:a16="http://schemas.microsoft.com/office/drawing/2014/main" id="{B7D9BA36-B640-2A39-0664-B69BD84EBDD3}"/>
+                </a:ext>
+              </a:extLst>
+            </p:cNvPr>
+            <p:cNvSpPr/>
+            <p:nvPr>
+              <p:custDataLst>
+                <p:tags r:id="rId7"/>
+              </p:custDataLst>
+            </p:nvPr>
+          </p:nvSpPr>
+          <p:spPr>
+            <a:xfrm>
+              <a:off x="4416552" y="2140606"/>
+              <a:ext cx="3200400" cy="54864"/>
+            </a:xfrm>
+            <a:prstGeom prst="rect">
+              <a:avLst/>
+            </a:prstGeom>
+            <a:solidFill>
+              <a:srgbClr val="FF8F00"/>
+            </a:solidFill>
+            <a:ln>
+              <a:solidFill>
+                <a:srgbClr val="FF8F00"/>
+              </a:solidFill>
+            </a:ln>
+          </p:spPr>
+          <p:style>
+            <a:lnRef idx="1">
+              <a:schemeClr val="accent1"/>
+            </a:lnRef>
+            <a:fillRef idx="3">
+              <a:schemeClr val="accent1"/>
+            </a:fillRef>
+            <a:effectRef idx="2">
+              <a:schemeClr val="accent1"/>
+            </a:effectRef>
+            <a:fontRef idx="minor">
+              <a:schemeClr val="lt1"/>
+            </a:fontRef>
+          </p:style>
+          <p:txBody>
+            <a:bodyPr rtlCol="0" anchor="ctr"/>
+            <a:lstStyle/>
+            <a:p>
+              <a:pPr algn="ctr"/>
+              <a:endParaRPr/>
+            </a:p>
+          </p:txBody>
+        </p:sp>
+        <p:sp>
+          <p:nvSpPr>
+            <p:cNvPr id="24" name="TextBox 23">
+              <a:extLst>
+                <a:ext uri="{FF2B5EF4-FFF2-40B4-BE49-F238E27FC236}">
+                  <a16:creationId xmlns:a16="http://schemas.microsoft.com/office/drawing/2014/main" id="{4DCB8637-7BB0-8DAE-4C3F-F03F3C7F87E8}"/>
+                </a:ext>
+              </a:extLst>
+            </p:cNvPr>
+            <p:cNvSpPr txBox="1"/>
+            <p:nvPr>
+              <p:custDataLst>
+                <p:tags r:id="rId8"/>
+              </p:custDataLst>
+            </p:nvPr>
+          </p:nvSpPr>
+          <p:spPr>
+            <a:xfrm>
+              <a:off x="4617720" y="1618488"/>
+              <a:ext cx="2299735" cy="470124"/>
+            </a:xfrm>
+            <a:prstGeom prst="rect">
+              <a:avLst/>
+            </a:prstGeom>
+            <a:noFill/>
+          </p:spPr>
+          <p:txBody>
+            <a:bodyPr wrap="none" anchor="t">
+              <a:spAutoFit/>
+            </a:bodyPr>
+            <a:lstStyle/>
+            <a:p>
+              <a:pPr algn="l">
+                <a:defRPr sz="1500" b="1" i="0">
+                  <a:solidFill>
+                    <a:srgbClr val="052646"/>
+                  </a:solidFill>
+                  <a:latin typeface="Arial" panose="020B0604020202020204"/>
+                </a:defRPr>
+              </a:pPr>
+              <a:r>
+                <a:rPr lang="en-US" dirty="0"/>
+                <a:t>Sentence-level evidence</a:t>
+              </a:r>
+              <a:endParaRPr dirty="0"/>
+            </a:p>
+          </p:txBody>
+        </p:sp>
+        <p:sp>
+          <p:nvSpPr>
+            <p:cNvPr id="25" name="TextBox 24">
+              <a:extLst>
+                <a:ext uri="{FF2B5EF4-FFF2-40B4-BE49-F238E27FC236}">
+                  <a16:creationId xmlns:a16="http://schemas.microsoft.com/office/drawing/2014/main" id="{52306CE0-FF60-A7DC-18EC-0DBFE0838FF7}"/>
+                </a:ext>
+              </a:extLst>
+            </p:cNvPr>
+            <p:cNvSpPr txBox="1"/>
+            <p:nvPr>
+              <p:custDataLst>
+                <p:tags r:id="rId9"/>
+              </p:custDataLst>
+            </p:nvPr>
+          </p:nvSpPr>
+          <p:spPr>
+            <a:xfrm>
+              <a:off x="4617720" y="2319532"/>
+              <a:ext cx="2798064" cy="940249"/>
+            </a:xfrm>
+            <a:prstGeom prst="rect">
+              <a:avLst/>
+            </a:prstGeom>
+            <a:noFill/>
+          </p:spPr>
+          <p:txBody>
+            <a:bodyPr wrap="square">
+              <a:spAutoFit/>
+            </a:bodyPr>
+            <a:lstStyle/>
+            <a:p>
+              <a:pPr>
+                <a:defRPr sz="1100" b="0">
+                  <a:solidFill>
+                    <a:srgbClr val="5B6979"/>
+                  </a:solidFill>
+                  <a:latin typeface="Arial" panose="020B0604020202020204"/>
+                </a:defRPr>
+              </a:pPr>
+              <a:r>
+                <a:rPr lang="en-US" sz="1200" dirty="0"/>
+                <a:t>Each sentence becomes a search unit; retrieved evidence is verified with NLI and linked to a source. </a:t>
+              </a:r>
+              <a:endParaRPr sz="1200" dirty="0"/>
+            </a:p>
+          </p:txBody>
+        </p:sp>
+        <p:sp>
+          <p:nvSpPr>
+            <p:cNvPr id="26" name="TextBox 25">
+              <a:extLst>
+                <a:ext uri="{FF2B5EF4-FFF2-40B4-BE49-F238E27FC236}">
+                  <a16:creationId xmlns:a16="http://schemas.microsoft.com/office/drawing/2014/main" id="{87F394D9-EC6B-EF79-949F-50ED5A982609}"/>
+                </a:ext>
+              </a:extLst>
+            </p:cNvPr>
+            <p:cNvSpPr txBox="1"/>
+            <p:nvPr>
+              <p:custDataLst>
+                <p:tags r:id="rId10"/>
+              </p:custDataLst>
+            </p:nvPr>
+          </p:nvSpPr>
+          <p:spPr>
+            <a:xfrm>
+              <a:off x="4617720" y="1459560"/>
+              <a:ext cx="822960" cy="201168"/>
+            </a:xfrm>
+            <a:prstGeom prst="rect">
+              <a:avLst/>
+            </a:prstGeom>
+            <a:noFill/>
+          </p:spPr>
+          <p:txBody>
+            <a:bodyPr wrap="none" anchor="t">
+              <a:spAutoFit/>
+            </a:bodyPr>
+            <a:lstStyle/>
+            <a:p>
+              <a:pPr algn="l">
+                <a:defRPr sz="900" b="1" i="0">
+                  <a:solidFill>
+                    <a:srgbClr val="FF8F00"/>
+                  </a:solidFill>
+                  <a:latin typeface="Arial" panose="020B0604020202020204"/>
+                </a:defRPr>
+              </a:pPr>
+              <a:r>
+                <a:rPr dirty="0"/>
+                <a:t>STEP 02</a:t>
+              </a:r>
+            </a:p>
+          </p:txBody>
+        </p:sp>
+      </p:grpSp>
+      <p:grpSp>
+        <p:nvGrpSpPr>
+          <p:cNvPr id="27" name="Group 26">
+            <a:extLst>
+              <a:ext uri="{FF2B5EF4-FFF2-40B4-BE49-F238E27FC236}">
+                <a16:creationId xmlns:a16="http://schemas.microsoft.com/office/drawing/2014/main" id="{F057AA27-F1D9-3979-C406-A6EA2D7656BC}"/>
+              </a:ext>
+            </a:extLst>
+          </p:cNvPr>
+          <p:cNvGrpSpPr/>
+          <p:nvPr/>
+        </p:nvGrpSpPr>
+        <p:grpSpPr>
+          <a:xfrm>
+            <a:off x="8152861" y="4884484"/>
+            <a:ext cx="3353339" cy="1351409"/>
+            <a:chOff x="8147304" y="1417319"/>
+            <a:chExt cx="3209547" cy="2295409"/>
+          </a:xfrm>
+        </p:grpSpPr>
+        <p:sp>
+          <p:nvSpPr>
+            <p:cNvPr id="28" name="Rounded Rectangle 27">
+              <a:extLst>
+                <a:ext uri="{FF2B5EF4-FFF2-40B4-BE49-F238E27FC236}">
+                  <a16:creationId xmlns:a16="http://schemas.microsoft.com/office/drawing/2014/main" id="{64A65C6F-12FC-70D6-C539-B4EB3F3F4B17}"/>
+                </a:ext>
+              </a:extLst>
+            </p:cNvPr>
+            <p:cNvSpPr/>
+            <p:nvPr>
+              <p:custDataLst>
+                <p:tags r:id="rId1"/>
+              </p:custDataLst>
+            </p:nvPr>
+          </p:nvSpPr>
+          <p:spPr>
+            <a:xfrm>
+              <a:off x="8147304" y="1417319"/>
+              <a:ext cx="3200400" cy="2295409"/>
+            </a:xfrm>
+            <a:prstGeom prst="roundRect">
+              <a:avLst/>
+            </a:prstGeom>
+            <a:solidFill>
+              <a:srgbClr val="F4F7FA"/>
+            </a:solidFill>
+            <a:ln w="12700">
+              <a:solidFill>
+                <a:srgbClr val="DCE2EB"/>
+              </a:solidFill>
+            </a:ln>
+          </p:spPr>
+          <p:style>
+            <a:lnRef idx="1">
+              <a:schemeClr val="accent1"/>
+            </a:lnRef>
+            <a:fillRef idx="3">
+              <a:schemeClr val="accent1"/>
+            </a:fillRef>
+            <a:effectRef idx="2">
+              <a:schemeClr val="accent1"/>
+            </a:effectRef>
+            <a:fontRef idx="minor">
+              <a:schemeClr val="lt1"/>
+            </a:fontRef>
+          </p:style>
+          <p:txBody>
+            <a:bodyPr rtlCol="0" anchor="ctr"/>
+            <a:lstStyle/>
+            <a:p>
+              <a:pPr algn="ctr"/>
+              <a:endParaRPr/>
+            </a:p>
+          </p:txBody>
+        </p:sp>
+        <p:sp>
+          <p:nvSpPr>
+            <p:cNvPr id="29" name="Rectangle 28">
+              <a:extLst>
+                <a:ext uri="{FF2B5EF4-FFF2-40B4-BE49-F238E27FC236}">
+                  <a16:creationId xmlns:a16="http://schemas.microsoft.com/office/drawing/2014/main" id="{8898BC3F-C083-CC49-D9BC-E29896902EDB}"/>
+                </a:ext>
+              </a:extLst>
+            </p:cNvPr>
+            <p:cNvSpPr/>
+            <p:nvPr>
+              <p:custDataLst>
+                <p:tags r:id="rId2"/>
+              </p:custDataLst>
+            </p:nvPr>
+          </p:nvSpPr>
+          <p:spPr>
+            <a:xfrm>
+              <a:off x="8156451" y="2133894"/>
+              <a:ext cx="3200400" cy="54864"/>
+            </a:xfrm>
+            <a:prstGeom prst="rect">
+              <a:avLst/>
+            </a:prstGeom>
+            <a:solidFill>
+              <a:srgbClr val="279F60"/>
+            </a:solidFill>
+            <a:ln>
+              <a:solidFill>
+                <a:srgbClr val="279F60"/>
+              </a:solidFill>
+            </a:ln>
+          </p:spPr>
+          <p:style>
+            <a:lnRef idx="1">
+              <a:schemeClr val="accent1"/>
+            </a:lnRef>
+            <a:fillRef idx="3">
+              <a:schemeClr val="accent1"/>
+            </a:fillRef>
+            <a:effectRef idx="2">
+              <a:schemeClr val="accent1"/>
+            </a:effectRef>
+            <a:fontRef idx="minor">
+              <a:schemeClr val="lt1"/>
+            </a:fontRef>
+          </p:style>
+          <p:txBody>
+            <a:bodyPr rtlCol="0" anchor="ctr"/>
+            <a:lstStyle/>
+            <a:p>
+              <a:pPr algn="ctr"/>
+              <a:endParaRPr/>
+            </a:p>
+          </p:txBody>
+        </p:sp>
+        <p:sp>
+          <p:nvSpPr>
+            <p:cNvPr id="30" name="TextBox 29">
+              <a:extLst>
+                <a:ext uri="{FF2B5EF4-FFF2-40B4-BE49-F238E27FC236}">
+                  <a16:creationId xmlns:a16="http://schemas.microsoft.com/office/drawing/2014/main" id="{D5B7621E-B49A-6C06-5391-40E8A49D49DA}"/>
+                </a:ext>
+              </a:extLst>
+            </p:cNvPr>
+            <p:cNvSpPr txBox="1"/>
+            <p:nvPr>
+              <p:custDataLst>
+                <p:tags r:id="rId3"/>
+              </p:custDataLst>
+            </p:nvPr>
+          </p:nvSpPr>
+          <p:spPr>
+            <a:xfrm>
+              <a:off x="8348472" y="1618488"/>
+              <a:ext cx="2037812" cy="548906"/>
+            </a:xfrm>
+            <a:prstGeom prst="rect">
+              <a:avLst/>
+            </a:prstGeom>
+            <a:noFill/>
+          </p:spPr>
+          <p:txBody>
+            <a:bodyPr wrap="none" anchor="t">
+              <a:spAutoFit/>
+            </a:bodyPr>
+            <a:lstStyle/>
+            <a:p>
+              <a:pPr algn="l">
+                <a:defRPr sz="1500" b="1" i="0">
+                  <a:solidFill>
+                    <a:srgbClr val="052646"/>
+                  </a:solidFill>
+                  <a:latin typeface="Arial" panose="020B0604020202020204"/>
+                </a:defRPr>
+              </a:pPr>
+              <a:r>
+                <a:rPr lang="en-US" dirty="0"/>
+                <a:t>Chat-style inspection</a:t>
+              </a:r>
+              <a:endParaRPr dirty="0"/>
+            </a:p>
+          </p:txBody>
+        </p:sp>
+        <p:sp>
+          <p:nvSpPr>
+            <p:cNvPr id="31" name="TextBox 30">
+              <a:extLst>
+                <a:ext uri="{FF2B5EF4-FFF2-40B4-BE49-F238E27FC236}">
+                  <a16:creationId xmlns:a16="http://schemas.microsoft.com/office/drawing/2014/main" id="{5E88EF95-9D32-D0E8-3973-C9D69D7F795D}"/>
+                </a:ext>
+              </a:extLst>
+            </p:cNvPr>
+            <p:cNvSpPr txBox="1"/>
+            <p:nvPr>
+              <p:custDataLst>
+                <p:tags r:id="rId4"/>
+              </p:custDataLst>
+            </p:nvPr>
+          </p:nvSpPr>
+          <p:spPr>
+            <a:xfrm>
+              <a:off x="8348472" y="2319531"/>
+              <a:ext cx="2798064" cy="1097813"/>
+            </a:xfrm>
+            <a:prstGeom prst="rect">
+              <a:avLst/>
+            </a:prstGeom>
+            <a:noFill/>
+          </p:spPr>
+          <p:txBody>
+            <a:bodyPr wrap="square">
+              <a:spAutoFit/>
+            </a:bodyPr>
+            <a:lstStyle/>
+            <a:p>
+              <a:pPr>
+                <a:defRPr sz="1100" b="0">
+                  <a:solidFill>
+                    <a:srgbClr val="5B6979"/>
+                  </a:solidFill>
+                  <a:latin typeface="Arial" panose="020B0604020202020204"/>
+                </a:defRPr>
+              </a:pPr>
+              <a:r>
+                <a:rPr lang="en-US" sz="1200" dirty="0"/>
+                <a:t>The chat tab reuses cached pipeline results for sentiment, claims, and final summary. </a:t>
+              </a:r>
+              <a:endParaRPr sz="1200" dirty="0"/>
+            </a:p>
+          </p:txBody>
+        </p:sp>
+        <p:sp>
+          <p:nvSpPr>
+            <p:cNvPr id="32" name="TextBox 31">
+              <a:extLst>
+                <a:ext uri="{FF2B5EF4-FFF2-40B4-BE49-F238E27FC236}">
+                  <a16:creationId xmlns:a16="http://schemas.microsoft.com/office/drawing/2014/main" id="{C3461405-CA25-04B4-5CF2-058BADCAA5EE}"/>
+                </a:ext>
+              </a:extLst>
+            </p:cNvPr>
+            <p:cNvSpPr txBox="1"/>
+            <p:nvPr>
+              <p:custDataLst>
+                <p:tags r:id="rId5"/>
+              </p:custDataLst>
+            </p:nvPr>
+          </p:nvSpPr>
+          <p:spPr>
+            <a:xfrm>
+              <a:off x="8348472" y="1458468"/>
+              <a:ext cx="822960" cy="201168"/>
+            </a:xfrm>
+            <a:prstGeom prst="rect">
+              <a:avLst/>
+            </a:prstGeom>
+            <a:noFill/>
+          </p:spPr>
+          <p:txBody>
+            <a:bodyPr wrap="none" anchor="t">
+              <a:spAutoFit/>
+            </a:bodyPr>
+            <a:lstStyle/>
+            <a:p>
+              <a:pPr algn="l">
+                <a:defRPr sz="900" b="1" i="0">
+                  <a:solidFill>
+                    <a:srgbClr val="279F60"/>
+                  </a:solidFill>
+                  <a:latin typeface="Arial" panose="020B0604020202020204"/>
+                </a:defRPr>
+              </a:pPr>
+              <a:r>
+                <a:rPr dirty="0"/>
+                <a:t>STEP 03</a:t>
+              </a:r>
+            </a:p>
+          </p:txBody>
+        </p:sp>
+      </p:grpSp>
+    </p:spTree>
+    <p:extLst>
+      <p:ext uri="{BB962C8B-B14F-4D97-AF65-F5344CB8AC3E}">
+        <p14:creationId xmlns:p14="http://schemas.microsoft.com/office/powerpoint/2010/main" val="2643541388"/>
+      </p:ext>
+    </p:extLst>
+  </p:cSld>
+  <p:clrMapOvr>
+    <a:masterClrMapping/>
+  </p:clrMapOvr>
+</p:sld>
+</file>
+
+<file path=ppt/slides/slide17.xml><?xml version="1.0" encoding="utf-8"?>
 <p:sld xmlns:a="http://schemas.openxmlformats.org/drawingml/2006/main" xmlns:r="http://schemas.openxmlformats.org/officeDocument/2006/relationships" xmlns:p="http://schemas.openxmlformats.org/presentationml/2006/main">
   <p:cSld>
     <p:bg>
@@ -20625,17 +20893,7 @@
                   </a:schemeClr>
                 </a:solidFill>
               </a:rPr>
-              <a:t>Outdated </a:t>
-            </a:r>
-            <a:r>
-              <a:rPr lang="en-US" dirty="0" err="1">
-                <a:solidFill>
-                  <a:schemeClr val="accent4">
-                    <a:lumMod val="75000"/>
-                  </a:schemeClr>
-                </a:solidFill>
-              </a:rPr>
-              <a:t>evidance</a:t>
+              <a:t>Outdated evidence</a:t>
             </a:r>
             <a:endParaRPr dirty="0">
               <a:solidFill>
@@ -27335,15 +27593,105 @@
 </p:tagLst>
 </file>
 
+<file path=ppt/tags/tag28.xml><?xml version="1.0" encoding="utf-8"?>
+<p:tagLst xmlns:a="http://schemas.openxmlformats.org/drawingml/2006/main" xmlns:r="http://schemas.openxmlformats.org/officeDocument/2006/relationships" xmlns:p="http://schemas.openxmlformats.org/presentationml/2006/main">
+  <p:tag name="KSO_WM_DIAGRAM_VIRTUALLY_FRAME" val="{&quot;height&quot;:154.8,&quot;left&quot;:54,&quot;top&quot;:111.6,&quot;width&quot;:839.5200000000001}"/>
+</p:tagLst>
+</file>
+
+<file path=ppt/tags/tag29.xml><?xml version="1.0" encoding="utf-8"?>
+<p:tagLst xmlns:a="http://schemas.openxmlformats.org/drawingml/2006/main" xmlns:r="http://schemas.openxmlformats.org/officeDocument/2006/relationships" xmlns:p="http://schemas.openxmlformats.org/presentationml/2006/main">
+  <p:tag name="KSO_WM_DIAGRAM_VIRTUALLY_FRAME" val="{&quot;height&quot;:154.8,&quot;left&quot;:54,&quot;top&quot;:111.6,&quot;width&quot;:839.5200000000001}"/>
+</p:tagLst>
+</file>
+
 <file path=ppt/tags/tag3.xml><?xml version="1.0" encoding="utf-8"?>
 <p:tagLst xmlns:a="http://schemas.openxmlformats.org/drawingml/2006/main" xmlns:r="http://schemas.openxmlformats.org/officeDocument/2006/relationships" xmlns:p="http://schemas.openxmlformats.org/presentationml/2006/main">
   <p:tag name="KSO_WM_DIAGRAM_VIRTUALLY_FRAME" val="{&quot;height&quot;:183.6,&quot;left&quot;:54,&quot;top&quot;:154.8,&quot;width&quot;:853.2}"/>
 </p:tagLst>
 </file>
 
+<file path=ppt/tags/tag30.xml><?xml version="1.0" encoding="utf-8"?>
+<p:tagLst xmlns:a="http://schemas.openxmlformats.org/drawingml/2006/main" xmlns:r="http://schemas.openxmlformats.org/officeDocument/2006/relationships" xmlns:p="http://schemas.openxmlformats.org/presentationml/2006/main">
+  <p:tag name="KSO_WM_DIAGRAM_VIRTUALLY_FRAME" val="{&quot;height&quot;:154.8,&quot;left&quot;:54,&quot;top&quot;:111.6,&quot;width&quot;:839.5200000000001}"/>
+</p:tagLst>
+</file>
+
+<file path=ppt/tags/tag31.xml><?xml version="1.0" encoding="utf-8"?>
+<p:tagLst xmlns:a="http://schemas.openxmlformats.org/drawingml/2006/main" xmlns:r="http://schemas.openxmlformats.org/officeDocument/2006/relationships" xmlns:p="http://schemas.openxmlformats.org/presentationml/2006/main">
+  <p:tag name="KSO_WM_DIAGRAM_VIRTUALLY_FRAME" val="{&quot;height&quot;:154.8,&quot;left&quot;:54,&quot;top&quot;:111.6,&quot;width&quot;:839.5200000000001}"/>
+</p:tagLst>
+</file>
+
+<file path=ppt/tags/tag32.xml><?xml version="1.0" encoding="utf-8"?>
+<p:tagLst xmlns:a="http://schemas.openxmlformats.org/drawingml/2006/main" xmlns:r="http://schemas.openxmlformats.org/officeDocument/2006/relationships" xmlns:p="http://schemas.openxmlformats.org/presentationml/2006/main">
+  <p:tag name="KSO_WM_DIAGRAM_VIRTUALLY_FRAME" val="{&quot;height&quot;:154.8,&quot;left&quot;:54,&quot;top&quot;:111.6,&quot;width&quot;:839.5200000000001}"/>
+</p:tagLst>
+</file>
+
+<file path=ppt/tags/tag33.xml><?xml version="1.0" encoding="utf-8"?>
+<p:tagLst xmlns:a="http://schemas.openxmlformats.org/drawingml/2006/main" xmlns:r="http://schemas.openxmlformats.org/officeDocument/2006/relationships" xmlns:p="http://schemas.openxmlformats.org/presentationml/2006/main">
+  <p:tag name="KSO_WM_DIAGRAM_VIRTUALLY_FRAME" val="{&quot;height&quot;:154.8,&quot;left&quot;:54,&quot;top&quot;:111.6,&quot;width&quot;:839.5200000000001}"/>
+</p:tagLst>
+</file>
+
+<file path=ppt/tags/tag34.xml><?xml version="1.0" encoding="utf-8"?>
+<p:tagLst xmlns:a="http://schemas.openxmlformats.org/drawingml/2006/main" xmlns:r="http://schemas.openxmlformats.org/officeDocument/2006/relationships" xmlns:p="http://schemas.openxmlformats.org/presentationml/2006/main">
+  <p:tag name="KSO_WM_DIAGRAM_VIRTUALLY_FRAME" val="{&quot;height&quot;:154.8,&quot;left&quot;:54,&quot;top&quot;:111.6,&quot;width&quot;:839.5200000000001}"/>
+</p:tagLst>
+</file>
+
+<file path=ppt/tags/tag35.xml><?xml version="1.0" encoding="utf-8"?>
+<p:tagLst xmlns:a="http://schemas.openxmlformats.org/drawingml/2006/main" xmlns:r="http://schemas.openxmlformats.org/officeDocument/2006/relationships" xmlns:p="http://schemas.openxmlformats.org/presentationml/2006/main">
+  <p:tag name="KSO_WM_DIAGRAM_VIRTUALLY_FRAME" val="{&quot;height&quot;:154.8,&quot;left&quot;:54,&quot;top&quot;:111.6,&quot;width&quot;:839.5200000000001}"/>
+</p:tagLst>
+</file>
+
+<file path=ppt/tags/tag36.xml><?xml version="1.0" encoding="utf-8"?>
+<p:tagLst xmlns:a="http://schemas.openxmlformats.org/drawingml/2006/main" xmlns:r="http://schemas.openxmlformats.org/officeDocument/2006/relationships" xmlns:p="http://schemas.openxmlformats.org/presentationml/2006/main">
+  <p:tag name="KSO_WM_DIAGRAM_VIRTUALLY_FRAME" val="{&quot;height&quot;:154.8,&quot;left&quot;:54,&quot;top&quot;:111.6,&quot;width&quot;:839.5200000000001}"/>
+</p:tagLst>
+</file>
+
+<file path=ppt/tags/tag37.xml><?xml version="1.0" encoding="utf-8"?>
+<p:tagLst xmlns:a="http://schemas.openxmlformats.org/drawingml/2006/main" xmlns:r="http://schemas.openxmlformats.org/officeDocument/2006/relationships" xmlns:p="http://schemas.openxmlformats.org/presentationml/2006/main">
+  <p:tag name="KSO_WM_DIAGRAM_VIRTUALLY_FRAME" val="{&quot;height&quot;:154.8,&quot;left&quot;:54,&quot;top&quot;:111.6,&quot;width&quot;:839.5200000000001}"/>
+</p:tagLst>
+</file>
+
+<file path=ppt/tags/tag38.xml><?xml version="1.0" encoding="utf-8"?>
+<p:tagLst xmlns:a="http://schemas.openxmlformats.org/drawingml/2006/main" xmlns:r="http://schemas.openxmlformats.org/officeDocument/2006/relationships" xmlns:p="http://schemas.openxmlformats.org/presentationml/2006/main">
+  <p:tag name="KSO_WM_DIAGRAM_VIRTUALLY_FRAME" val="{&quot;height&quot;:154.8,&quot;left&quot;:54,&quot;top&quot;:111.6,&quot;width&quot;:839.5200000000001}"/>
+</p:tagLst>
+</file>
+
+<file path=ppt/tags/tag39.xml><?xml version="1.0" encoding="utf-8"?>
+<p:tagLst xmlns:a="http://schemas.openxmlformats.org/drawingml/2006/main" xmlns:r="http://schemas.openxmlformats.org/officeDocument/2006/relationships" xmlns:p="http://schemas.openxmlformats.org/presentationml/2006/main">
+  <p:tag name="KSO_WM_DIAGRAM_VIRTUALLY_FRAME" val="{&quot;height&quot;:154.8,&quot;left&quot;:54,&quot;top&quot;:111.6,&quot;width&quot;:839.5200000000001}"/>
+</p:tagLst>
+</file>
+
 <file path=ppt/tags/tag4.xml><?xml version="1.0" encoding="utf-8"?>
 <p:tagLst xmlns:a="http://schemas.openxmlformats.org/drawingml/2006/main" xmlns:r="http://schemas.openxmlformats.org/officeDocument/2006/relationships" xmlns:p="http://schemas.openxmlformats.org/presentationml/2006/main">
   <p:tag name="KSO_WM_DIAGRAM_VIRTUALLY_FRAME" val="{&quot;height&quot;:183.6,&quot;left&quot;:54,&quot;top&quot;:154.8,&quot;width&quot;:853.2}"/>
+</p:tagLst>
+</file>
+
+<file path=ppt/tags/tag40.xml><?xml version="1.0" encoding="utf-8"?>
+<p:tagLst xmlns:a="http://schemas.openxmlformats.org/drawingml/2006/main" xmlns:r="http://schemas.openxmlformats.org/officeDocument/2006/relationships" xmlns:p="http://schemas.openxmlformats.org/presentationml/2006/main">
+  <p:tag name="KSO_WM_DIAGRAM_VIRTUALLY_FRAME" val="{&quot;height&quot;:154.8,&quot;left&quot;:54,&quot;top&quot;:111.6,&quot;width&quot;:839.5200000000001}"/>
+</p:tagLst>
+</file>
+
+<file path=ppt/tags/tag41.xml><?xml version="1.0" encoding="utf-8"?>
+<p:tagLst xmlns:a="http://schemas.openxmlformats.org/drawingml/2006/main" xmlns:r="http://schemas.openxmlformats.org/officeDocument/2006/relationships" xmlns:p="http://schemas.openxmlformats.org/presentationml/2006/main">
+  <p:tag name="KSO_WM_DIAGRAM_VIRTUALLY_FRAME" val="{&quot;height&quot;:154.8,&quot;left&quot;:54,&quot;top&quot;:111.6,&quot;width&quot;:839.5200000000001}"/>
+</p:tagLst>
+</file>
+
+<file path=ppt/tags/tag42.xml><?xml version="1.0" encoding="utf-8"?>
+<p:tagLst xmlns:a="http://schemas.openxmlformats.org/drawingml/2006/main" xmlns:r="http://schemas.openxmlformats.org/officeDocument/2006/relationships" xmlns:p="http://schemas.openxmlformats.org/presentationml/2006/main">
+  <p:tag name="KSO_WM_DIAGRAM_VIRTUALLY_FRAME" val="{&quot;height&quot;:154.8,&quot;left&quot;:54,&quot;top&quot;:111.6,&quot;width&quot;:839.5200000000001}"/>
 </p:tagLst>
 </file>
 
